--- a/outputs/R.M._risk_regulatory.pptx
+++ b/outputs/R.M._risk_regulatory.pptx
@@ -3103,61 +3103,6 @@
           <a:prstGeom prst="rect">
             <a:avLst/>
           </a:prstGeom>
-          <a:ln>
-            <a:noFill/>
-          </a:ln>
-          <a:effectLst/>
-          <a:gradFill flip="none" rotWithShape="1">
-            <a:gsLst>
-              <a:gs pos="0">
-                <a:srgbClr val="07227A"/>
-              </a:gs>
-              <a:gs pos="85000">
-                <a:srgbClr val="07227A"/>
-              </a:gs>
-              <a:gs pos="100000">
-                <a:srgbClr val="1FCBD9"/>
-              </a:gs>
-            </a:gsLst>
-            <a:lin ang="2700000" scaled="0"/>
-          </a:gradFill>
-        </p:spPr>
-        <p:style>
-          <a:lnRef idx="1">
-            <a:schemeClr val="accent1"/>
-          </a:lnRef>
-          <a:fillRef idx="3">
-            <a:schemeClr val="accent1"/>
-          </a:fillRef>
-          <a:effectRef idx="2">
-            <a:schemeClr val="accent1"/>
-          </a:effectRef>
-          <a:fontRef idx="minor">
-            <a:schemeClr val="lt1"/>
-          </a:fontRef>
-        </p:style>
-        <p:txBody>
-          <a:bodyPr rtlCol="0" anchor="ctr"/>
-          <a:lstStyle/>
-          <a:p>
-            <a:pPr algn="ctr"/>
-          </a:p>
-        </p:txBody>
-      </p:sp>
-      <p:sp>
-        <p:nvSpPr>
-          <p:cNvPr id="3" name="Rectangle 2"/>
-          <p:cNvSpPr/>
-          <p:nvPr/>
-        </p:nvSpPr>
-        <p:spPr>
-          <a:xfrm>
-            <a:off x="0" y="0"/>
-            <a:ext cx="4300000" cy="6858000"/>
-          </a:xfrm>
-          <a:prstGeom prst="rect">
-            <a:avLst/>
-          </a:prstGeom>
           <a:solidFill>
             <a:srgbClr val="061A5E"/>
           </a:solidFill>
@@ -3190,7 +3135,1102 @@
       </p:sp>
       <p:sp>
         <p:nvSpPr>
-          <p:cNvPr id="4" name="Rectangle 3"/>
+          <p:cNvPr id="3" name="Rectangle 2"/>
+          <p:cNvSpPr/>
+          <p:nvPr/>
+        </p:nvSpPr>
+        <p:spPr>
+          <a:xfrm>
+            <a:off x="4300000" y="0"/>
+            <a:ext cx="15000" cy="6858000"/>
+          </a:xfrm>
+          <a:prstGeom prst="rect">
+            <a:avLst/>
+          </a:prstGeom>
+          <a:solidFill>
+            <a:srgbClr val="3AEDE5"/>
+          </a:solidFill>
+          <a:ln>
+            <a:noFill/>
+          </a:ln>
+          <a:effectLst/>
+        </p:spPr>
+        <p:style>
+          <a:lnRef idx="1">
+            <a:schemeClr val="accent1"/>
+          </a:lnRef>
+          <a:fillRef idx="3">
+            <a:schemeClr val="accent1"/>
+          </a:fillRef>
+          <a:effectRef idx="2">
+            <a:schemeClr val="accent1"/>
+          </a:effectRef>
+          <a:fontRef idx="minor">
+            <a:schemeClr val="lt1"/>
+          </a:fontRef>
+        </p:style>
+        <p:txBody>
+          <a:bodyPr rtlCol="0" anchor="ctr"/>
+          <a:lstStyle/>
+          <a:p>
+            <a:pPr algn="ctr"/>
+          </a:p>
+        </p:txBody>
+      </p:sp>
+      <p:pic>
+        <p:nvPicPr>
+          <p:cNvPr id="4" name="Picture 3" descr="inside_circle_logo.png"/>
+          <p:cNvPicPr>
+            <a:picLocks noChangeAspect="1"/>
+          </p:cNvPicPr>
+          <p:nvPr/>
+        </p:nvPicPr>
+        <p:blipFill>
+          <a:blip r:embed="rId2"/>
+          <a:stretch>
+            <a:fillRect/>
+          </a:stretch>
+        </p:blipFill>
+        <p:spPr>
+          <a:xfrm>
+            <a:off x="10660000" y="130000"/>
+            <a:ext cx="1302000" cy="420000"/>
+          </a:xfrm>
+          <a:prstGeom prst="rect">
+            <a:avLst/>
+          </a:prstGeom>
+        </p:spPr>
+      </p:pic>
+      <p:sp>
+        <p:nvSpPr>
+          <p:cNvPr id="5" name="TextBox 4"/>
+          <p:cNvSpPr txBox="1"/>
+          <p:nvPr/>
+        </p:nvSpPr>
+        <p:spPr>
+          <a:xfrm>
+            <a:off x="228600" y="260000"/>
+            <a:ext cx="3842800" cy="800000"/>
+          </a:xfrm>
+          <a:prstGeom prst="rect">
+            <a:avLst/>
+          </a:prstGeom>
+          <a:noFill/>
+        </p:spPr>
+        <p:txBody>
+          <a:bodyPr wrap="square" lIns="0" rIns="0" tIns="0" bIns="0">
+            <a:spAutoFit/>
+          </a:bodyPr>
+          <a:lstStyle/>
+          <a:p>
+            <a:pPr algn="l"/>
+            <a:r>
+              <a:rPr sz="4800" b="1" i="0">
+                <a:solidFill>
+                  <a:srgbClr val="3AEDE5"/>
+                </a:solidFill>
+                <a:latin typeface="Alegreya Sans"/>
+              </a:rPr>
+              <a:t>R.M.</a:t>
+            </a:r>
+          </a:p>
+        </p:txBody>
+      </p:sp>
+      <p:sp>
+        <p:nvSpPr>
+          <p:cNvPr id="6" name="TextBox 5"/>
+          <p:cNvSpPr txBox="1"/>
+          <p:nvPr/>
+        </p:nvSpPr>
+        <p:spPr>
+          <a:xfrm>
+            <a:off x="4528600" y="300000"/>
+            <a:ext cx="5963400" cy="800000"/>
+          </a:xfrm>
+          <a:prstGeom prst="rect">
+            <a:avLst/>
+          </a:prstGeom>
+          <a:noFill/>
+        </p:spPr>
+        <p:txBody>
+          <a:bodyPr wrap="square" lIns="0" rIns="0" tIns="0" bIns="0">
+            <a:spAutoFit/>
+          </a:bodyPr>
+          <a:lstStyle/>
+          <a:p>
+            <a:r>
+              <a:rPr sz="2400" b="1" i="0">
+                <a:solidFill>
+                  <a:srgbClr val="FFFFFF"/>
+                </a:solidFill>
+                <a:latin typeface="Alegreya Sans"/>
+              </a:rPr>
+              <a:t>Consultant Senior — Risk &amp; Regulatory</a:t>
+            </a:r>
+          </a:p>
+          <a:p>
+            <a:pPr>
+              <a:spcBef>
+                <a:spcPts val="200"/>
+              </a:spcBef>
+            </a:pPr>
+            <a:r>
+              <a:rPr sz="1500" b="0" i="1">
+                <a:solidFill>
+                  <a:srgbClr val="3AEDE5"/>
+                </a:solidFill>
+                <a:latin typeface="Alegreya Sans"/>
+              </a:rPr>
+              <a:t>Banque &amp; CIB — Transformation réglementaire</a:t>
+            </a:r>
+          </a:p>
+        </p:txBody>
+      </p:sp>
+      <p:sp>
+        <p:nvSpPr>
+          <p:cNvPr id="7" name="TextBox 6"/>
+          <p:cNvSpPr txBox="1"/>
+          <p:nvPr/>
+        </p:nvSpPr>
+        <p:spPr>
+          <a:xfrm>
+            <a:off x="228600" y="1180000"/>
+            <a:ext cx="3842800" cy="5318000"/>
+          </a:xfrm>
+          <a:prstGeom prst="rect">
+            <a:avLst/>
+          </a:prstGeom>
+          <a:noFill/>
+        </p:spPr>
+        <p:txBody>
+          <a:bodyPr wrap="square" lIns="0" rIns="0" tIns="0" bIns="0">
+            <a:spAutoFit/>
+          </a:bodyPr>
+          <a:lstStyle/>
+          <a:p>
+            <a:pPr algn="l">
+              <a:spcAft>
+                <a:spcPts val="300"/>
+              </a:spcAft>
+            </a:pPr>
+            <a:r>
+              <a:rPr sz="1300" b="1" i="0">
+                <a:solidFill>
+                  <a:srgbClr val="3AEDE5"/>
+                </a:solidFill>
+                <a:latin typeface="Alegreya Sans"/>
+              </a:rPr>
+              <a:t>DOMAINES D'EXPERTISE</a:t>
+            </a:r>
+          </a:p>
+          <a:p>
+            <a:pPr algn="l">
+              <a:spcAft>
+                <a:spcPts val="100"/>
+              </a:spcAft>
+            </a:pPr>
+            <a:r>
+              <a:rPr sz="1200" b="1" i="0">
+                <a:solidFill>
+                  <a:srgbClr val="3AEDE5"/>
+                </a:solidFill>
+                <a:latin typeface="Alegreya Sans"/>
+              </a:rPr>
+              <a:t>•  </a:t>
+            </a:r>
+            <a:r>
+              <a:rPr sz="1200" b="0" i="0">
+                <a:solidFill>
+                  <a:srgbClr val="FFFFFF"/>
+                </a:solidFill>
+                <a:latin typeface="Alegreya Sans"/>
+              </a:rPr>
+              <a:t>Risk &amp; Regulatory</a:t>
+            </a:r>
+          </a:p>
+          <a:p>
+            <a:pPr algn="l">
+              <a:spcAft>
+                <a:spcPts val="100"/>
+              </a:spcAft>
+            </a:pPr>
+            <a:r>
+              <a:rPr sz="1200" b="1" i="0">
+                <a:solidFill>
+                  <a:srgbClr val="3AEDE5"/>
+                </a:solidFill>
+                <a:latin typeface="Alegreya Sans"/>
+              </a:rPr>
+              <a:t>•  </a:t>
+            </a:r>
+            <a:r>
+              <a:rPr sz="1200" b="0" i="0">
+                <a:solidFill>
+                  <a:srgbClr val="FFFFFF"/>
+                </a:solidFill>
+                <a:latin typeface="Alegreya Sans"/>
+              </a:rPr>
+              <a:t>Transformation bancaire (CIB / Retail)</a:t>
+            </a:r>
+          </a:p>
+          <a:p>
+            <a:pPr algn="l">
+              <a:spcAft>
+                <a:spcPts val="100"/>
+              </a:spcAft>
+            </a:pPr>
+            <a:r>
+              <a:rPr sz="1200" b="1" i="0">
+                <a:solidFill>
+                  <a:srgbClr val="3AEDE5"/>
+                </a:solidFill>
+                <a:latin typeface="Alegreya Sans"/>
+              </a:rPr>
+              <a:t>•  </a:t>
+            </a:r>
+            <a:r>
+              <a:rPr sz="1200" b="0" i="0">
+                <a:solidFill>
+                  <a:srgbClr val="FFFFFF"/>
+                </a:solidFill>
+                <a:latin typeface="Alegreya Sans"/>
+              </a:rPr>
+              <a:t>Modèles IRB &amp; Risque de crédit</a:t>
+            </a:r>
+          </a:p>
+          <a:p>
+            <a:pPr algn="l">
+              <a:spcAft>
+                <a:spcPts val="100"/>
+              </a:spcAft>
+            </a:pPr>
+            <a:r>
+              <a:rPr sz="1200" b="1" i="0">
+                <a:solidFill>
+                  <a:srgbClr val="3AEDE5"/>
+                </a:solidFill>
+                <a:latin typeface="Alegreya Sans"/>
+              </a:rPr>
+              <a:t>•  </a:t>
+            </a:r>
+            <a:r>
+              <a:rPr sz="1200" b="0" i="0">
+                <a:solidFill>
+                  <a:srgbClr val="FFFFFF"/>
+                </a:solidFill>
+                <a:latin typeface="Alegreya Sans"/>
+              </a:rPr>
+              <a:t>CRR 3 — Recovery &amp; Resolution</a:t>
+            </a:r>
+          </a:p>
+          <a:p>
+            <a:pPr algn="l">
+              <a:spcAft>
+                <a:spcPts val="100"/>
+              </a:spcAft>
+            </a:pPr>
+            <a:r>
+              <a:rPr sz="1200" b="1" i="0">
+                <a:solidFill>
+                  <a:srgbClr val="3AEDE5"/>
+                </a:solidFill>
+                <a:latin typeface="Alegreya Sans"/>
+              </a:rPr>
+              <a:t>•  </a:t>
+            </a:r>
+            <a:r>
+              <a:rPr sz="1200" b="0" i="0">
+                <a:solidFill>
+                  <a:srgbClr val="FFFFFF"/>
+                </a:solidFill>
+                <a:latin typeface="Alegreya Sans"/>
+              </a:rPr>
+              <a:t>Gouvernance des risques digitaux (AI Act)</a:t>
+            </a:r>
+          </a:p>
+          <a:p>
+            <a:pPr algn="l">
+              <a:spcBef>
+                <a:spcPts val="600"/>
+              </a:spcBef>
+              <a:spcAft>
+                <a:spcPts val="300"/>
+              </a:spcAft>
+            </a:pPr>
+            <a:r>
+              <a:rPr sz="1300" b="1" i="0">
+                <a:solidFill>
+                  <a:srgbClr val="3AEDE5"/>
+                </a:solidFill>
+                <a:latin typeface="Alegreya Sans"/>
+              </a:rPr>
+              <a:t>LANGUES</a:t>
+            </a:r>
+          </a:p>
+          <a:p>
+            <a:pPr algn="l">
+              <a:spcAft>
+                <a:spcPts val="100"/>
+              </a:spcAft>
+            </a:pPr>
+            <a:r>
+              <a:rPr sz="1200" b="1" i="0">
+                <a:solidFill>
+                  <a:srgbClr val="3AEDE5"/>
+                </a:solidFill>
+                <a:latin typeface="Alegreya Sans"/>
+              </a:rPr>
+              <a:t>•  </a:t>
+            </a:r>
+            <a:r>
+              <a:rPr sz="1200" b="0" i="0">
+                <a:solidFill>
+                  <a:srgbClr val="FFFFFF"/>
+                </a:solidFill>
+                <a:latin typeface="Alegreya Sans"/>
+              </a:rPr>
+              <a:t>Français — Langue maternelle</a:t>
+            </a:r>
+          </a:p>
+          <a:p>
+            <a:pPr algn="l">
+              <a:spcAft>
+                <a:spcPts val="100"/>
+              </a:spcAft>
+            </a:pPr>
+            <a:r>
+              <a:rPr sz="1200" b="1" i="0">
+                <a:solidFill>
+                  <a:srgbClr val="3AEDE5"/>
+                </a:solidFill>
+                <a:latin typeface="Alegreya Sans"/>
+              </a:rPr>
+              <a:t>•  </a:t>
+            </a:r>
+            <a:r>
+              <a:rPr sz="1200" b="0" i="0">
+                <a:solidFill>
+                  <a:srgbClr val="FFFFFF"/>
+                </a:solidFill>
+                <a:latin typeface="Alegreya Sans"/>
+              </a:rPr>
+              <a:t>Anglais — Courant</a:t>
+            </a:r>
+          </a:p>
+          <a:p>
+            <a:pPr algn="l">
+              <a:spcAft>
+                <a:spcPts val="100"/>
+              </a:spcAft>
+            </a:pPr>
+            <a:r>
+              <a:rPr sz="1200" b="1" i="0">
+                <a:solidFill>
+                  <a:srgbClr val="3AEDE5"/>
+                </a:solidFill>
+                <a:latin typeface="Alegreya Sans"/>
+              </a:rPr>
+              <a:t>•  </a:t>
+            </a:r>
+            <a:r>
+              <a:rPr sz="1200" b="0" i="0">
+                <a:solidFill>
+                  <a:srgbClr val="FFFFFF"/>
+                </a:solidFill>
+                <a:latin typeface="Alegreya Sans"/>
+              </a:rPr>
+              <a:t>Espagnol — Bases</a:t>
+            </a:r>
+          </a:p>
+          <a:p>
+            <a:pPr algn="l">
+              <a:spcBef>
+                <a:spcPts val="600"/>
+              </a:spcBef>
+              <a:spcAft>
+                <a:spcPts val="300"/>
+              </a:spcAft>
+            </a:pPr>
+            <a:r>
+              <a:rPr sz="1300" b="1" i="0">
+                <a:solidFill>
+                  <a:srgbClr val="3AEDE5"/>
+                </a:solidFill>
+                <a:latin typeface="Alegreya Sans"/>
+              </a:rPr>
+              <a:t>FORMATION &amp; CERTIFICATIONS</a:t>
+            </a:r>
+          </a:p>
+          <a:p>
+            <a:pPr algn="l">
+              <a:spcAft>
+                <a:spcPts val="100"/>
+              </a:spcAft>
+            </a:pPr>
+            <a:r>
+              <a:rPr sz="1200" b="1" i="0">
+                <a:solidFill>
+                  <a:srgbClr val="3AEDE5"/>
+                </a:solidFill>
+                <a:latin typeface="Alegreya Sans"/>
+              </a:rPr>
+              <a:t>2016 — 2017  </a:t>
+            </a:r>
+            <a:r>
+              <a:rPr sz="1200" b="1" i="0">
+                <a:solidFill>
+                  <a:srgbClr val="FFFFFF"/>
+                </a:solidFill>
+                <a:latin typeface="Alegreya Sans"/>
+              </a:rPr>
+              <a:t>Paris 1 Panthéon-Sorbonne</a:t>
+            </a:r>
+          </a:p>
+          <a:p>
+            <a:pPr algn="l">
+              <a:spcAft>
+                <a:spcPts val="300"/>
+              </a:spcAft>
+            </a:pPr>
+            <a:r>
+              <a:rPr sz="1200" b="0" i="1">
+                <a:solidFill>
+                  <a:srgbClr val="CCD6E8"/>
+                </a:solidFill>
+                <a:latin typeface="Alegreya Sans"/>
+              </a:rPr>
+              <a:t>Master 2 Banque &amp; Finance</a:t>
+            </a:r>
+          </a:p>
+          <a:p>
+            <a:pPr algn="l">
+              <a:spcAft>
+                <a:spcPts val="100"/>
+              </a:spcAft>
+            </a:pPr>
+            <a:r>
+              <a:rPr sz="1200" b="1" i="0">
+                <a:solidFill>
+                  <a:srgbClr val="3AEDE5"/>
+                </a:solidFill>
+                <a:latin typeface="Alegreya Sans"/>
+              </a:rPr>
+              <a:t>2013 — 2016  </a:t>
+            </a:r>
+            <a:r>
+              <a:rPr sz="1200" b="1" i="0">
+                <a:solidFill>
+                  <a:srgbClr val="FFFFFF"/>
+                </a:solidFill>
+                <a:latin typeface="Alegreya Sans"/>
+              </a:rPr>
+              <a:t>Bordeaux / Tampere</a:t>
+            </a:r>
+          </a:p>
+          <a:p>
+            <a:pPr algn="l">
+              <a:spcAft>
+                <a:spcPts val="300"/>
+              </a:spcAft>
+            </a:pPr>
+            <a:r>
+              <a:rPr sz="1200" b="0" i="1">
+                <a:solidFill>
+                  <a:srgbClr val="CCD6E8"/>
+                </a:solidFill>
+                <a:latin typeface="Alegreya Sans"/>
+              </a:rPr>
+              <a:t>Magistère d'Économie &amp; Finance Internati…</a:t>
+            </a:r>
+          </a:p>
+          <a:p>
+            <a:pPr algn="l">
+              <a:spcAft>
+                <a:spcPts val="100"/>
+              </a:spcAft>
+            </a:pPr>
+            <a:r>
+              <a:rPr sz="1200" b="1" i="0">
+                <a:solidFill>
+                  <a:srgbClr val="3AEDE5"/>
+                </a:solidFill>
+                <a:latin typeface="Alegreya Sans"/>
+              </a:rPr>
+              <a:t>2012 — 2013  </a:t>
+            </a:r>
+            <a:r>
+              <a:rPr sz="1200" b="1" i="0">
+                <a:solidFill>
+                  <a:srgbClr val="FFFFFF"/>
+                </a:solidFill>
+                <a:latin typeface="Alegreya Sans"/>
+              </a:rPr>
+              <a:t>Lycée Michel Montaigne</a:t>
+            </a:r>
+          </a:p>
+          <a:p>
+            <a:pPr algn="l">
+              <a:spcAft>
+                <a:spcPts val="300"/>
+              </a:spcAft>
+            </a:pPr>
+            <a:r>
+              <a:rPr sz="1200" b="0" i="1">
+                <a:solidFill>
+                  <a:srgbClr val="CCD6E8"/>
+                </a:solidFill>
+                <a:latin typeface="Alegreya Sans"/>
+              </a:rPr>
+              <a:t>Prépa HEC, voie ECE</a:t>
+            </a:r>
+          </a:p>
+          <a:p>
+            <a:pPr algn="l">
+              <a:spcBef>
+                <a:spcPts val="600"/>
+              </a:spcBef>
+              <a:spcAft>
+                <a:spcPts val="300"/>
+              </a:spcAft>
+            </a:pPr>
+            <a:r>
+              <a:rPr sz="1300" b="1" i="0">
+                <a:solidFill>
+                  <a:srgbClr val="3AEDE5"/>
+                </a:solidFill>
+                <a:latin typeface="Alegreya Sans"/>
+              </a:rPr>
+              <a:t>ENGAGEMENTS &amp; RÉALISATIONS</a:t>
+            </a:r>
+          </a:p>
+          <a:p>
+            <a:pPr algn="l">
+              <a:spcAft>
+                <a:spcPts val="200"/>
+              </a:spcAft>
+            </a:pPr>
+            <a:r>
+              <a:rPr sz="1200" b="1" i="0">
+                <a:solidFill>
+                  <a:srgbClr val="3AEDE5"/>
+                </a:solidFill>
+                <a:latin typeface="Alegreya Sans"/>
+              </a:rPr>
+              <a:t>• </a:t>
+            </a:r>
+            <a:r>
+              <a:rPr sz="1200" b="1" i="0">
+                <a:solidFill>
+                  <a:srgbClr val="FFFFFF"/>
+                </a:solidFill>
+                <a:latin typeface="Alegreya Sans"/>
+              </a:rPr>
+              <a:t>Auteur</a:t>
+            </a:r>
+            <a:r>
+              <a:rPr sz="1200" b="0" i="1">
+                <a:solidFill>
+                  <a:srgbClr val="CCD6E8"/>
+                </a:solidFill>
+                <a:latin typeface="Alegreya Sans"/>
+              </a:rPr>
+              <a:t> — Lettre réglementaire banque EY Fran…</a:t>
+            </a:r>
+          </a:p>
+          <a:p>
+            <a:pPr algn="l">
+              <a:spcAft>
+                <a:spcPts val="200"/>
+              </a:spcAft>
+            </a:pPr>
+            <a:r>
+              <a:rPr sz="1200" b="1" i="0">
+                <a:solidFill>
+                  <a:srgbClr val="3AEDE5"/>
+                </a:solidFill>
+                <a:latin typeface="Alegreya Sans"/>
+              </a:rPr>
+              <a:t>• </a:t>
+            </a:r>
+            <a:r>
+              <a:rPr sz="1200" b="1" i="0">
+                <a:solidFill>
+                  <a:srgbClr val="FFFFFF"/>
+                </a:solidFill>
+                <a:latin typeface="Alegreya Sans"/>
+              </a:rPr>
+              <a:t>Référent G-SIB</a:t>
+            </a:r>
+            <a:r>
+              <a:rPr sz="1200" b="0" i="1">
+                <a:solidFill>
+                  <a:srgbClr val="CCD6E8"/>
+                </a:solidFill>
+                <a:latin typeface="Alegreya Sans"/>
+              </a:rPr>
+              <a:t> — 2 comptes prioritaires Risk &amp; Regul…</a:t>
+            </a:r>
+          </a:p>
+          <a:p>
+            <a:pPr algn="l">
+              <a:spcAft>
+                <a:spcPts val="200"/>
+              </a:spcAft>
+            </a:pPr>
+            <a:r>
+              <a:rPr sz="1200" b="1" i="0">
+                <a:solidFill>
+                  <a:srgbClr val="3AEDE5"/>
+                </a:solidFill>
+                <a:latin typeface="Alegreya Sans"/>
+              </a:rPr>
+              <a:t>• </a:t>
+            </a:r>
+            <a:r>
+              <a:rPr sz="1200" b="1" i="0">
+                <a:solidFill>
+                  <a:srgbClr val="FFFFFF"/>
+                </a:solidFill>
+                <a:latin typeface="Alegreya Sans"/>
+              </a:rPr>
+              <a:t>Création de contenu</a:t>
+            </a:r>
+            <a:r>
+              <a:rPr sz="1200" b="0" i="1">
+                <a:solidFill>
+                  <a:srgbClr val="CCD6E8"/>
+                </a:solidFill>
+                <a:latin typeface="Alegreya Sans"/>
+              </a:rPr>
+              <a:t> — Podcast &amp; newsletter financiers</a:t>
+            </a:r>
+          </a:p>
+        </p:txBody>
+      </p:sp>
+      <p:sp>
+        <p:nvSpPr>
+          <p:cNvPr id="8" name="TextBox 7"/>
+          <p:cNvSpPr txBox="1"/>
+          <p:nvPr/>
+        </p:nvSpPr>
+        <p:spPr>
+          <a:xfrm>
+            <a:off x="4528600" y="1180000"/>
+            <a:ext cx="7434800" cy="5318000"/>
+          </a:xfrm>
+          <a:prstGeom prst="rect">
+            <a:avLst/>
+          </a:prstGeom>
+          <a:noFill/>
+        </p:spPr>
+        <p:txBody>
+          <a:bodyPr wrap="square" lIns="0" rIns="0" tIns="0" bIns="0">
+            <a:spAutoFit/>
+          </a:bodyPr>
+          <a:lstStyle/>
+          <a:p>
+            <a:pPr algn="l">
+              <a:spcAft>
+                <a:spcPts val="300"/>
+              </a:spcAft>
+            </a:pPr>
+            <a:r>
+              <a:rPr sz="1300" b="1" i="0">
+                <a:solidFill>
+                  <a:srgbClr val="3AEDE5"/>
+                </a:solidFill>
+                <a:latin typeface="Alegreya Sans"/>
+              </a:rPr>
+              <a:t>EXPÉRIENCE PROFESSIONNELLE</a:t>
+            </a:r>
+          </a:p>
+          <a:p>
+            <a:pPr algn="l">
+              <a:spcAft>
+                <a:spcPts val="100"/>
+              </a:spcAft>
+            </a:pPr>
+            <a:r>
+              <a:rPr sz="1200" b="1" i="0">
+                <a:solidFill>
+                  <a:srgbClr val="3AEDE5"/>
+                </a:solidFill>
+                <a:latin typeface="Alegreya Sans"/>
+              </a:rPr>
+              <a:t>▸ </a:t>
+            </a:r>
+            <a:r>
+              <a:rPr sz="1200" b="1" i="0">
+                <a:solidFill>
+                  <a:srgbClr val="FFFFFF"/>
+                </a:solidFill>
+                <a:latin typeface="Alegreya Sans"/>
+              </a:rPr>
+              <a:t>Inside (Inside Circle, Inside Banking, Inside Training)</a:t>
+            </a:r>
+            <a:r>
+              <a:rPr sz="1200" b="0" i="0">
+                <a:solidFill>
+                  <a:srgbClr val="FFFFFF"/>
+                </a:solidFill>
+                <a:latin typeface="Alegreya Sans"/>
+              </a:rPr>
+              <a:t> — Fondateur — Consultant indépendant</a:t>
+            </a:r>
+            <a:r>
+              <a:rPr sz="1200" b="0" i="1">
+                <a:solidFill>
+                  <a:srgbClr val="3AEDE5"/>
+                </a:solidFill>
+                <a:latin typeface="Alegreya Sans"/>
+              </a:rPr>
+              <a:t>  (Depuis Jan. 26)</a:t>
+            </a:r>
+          </a:p>
+          <a:p>
+            <a:pPr algn="l" lvl="1">
+              <a:spcAft>
+                <a:spcPts val="100"/>
+              </a:spcAft>
+            </a:pPr>
+            <a:r>
+              <a:rPr sz="1200" b="1" i="0">
+                <a:solidFill>
+                  <a:srgbClr val="3AEDE5"/>
+                </a:solidFill>
+                <a:latin typeface="Alegreya Sans"/>
+              </a:rPr>
+              <a:t>•  </a:t>
+            </a:r>
+            <a:r>
+              <a:rPr sz="1200" b="0" i="0">
+                <a:solidFill>
+                  <a:srgbClr val="FFFFFF"/>
+                </a:solidFill>
+                <a:latin typeface="Alegreya Sans"/>
+              </a:rPr>
+              <a:t>Communauté de freelances du secteur financier (banque, assurance, AM) ; média indépendant (2,5M vues 2025, podcast +50K écoutes, newsletter…</a:t>
+            </a:r>
+          </a:p>
+          <a:p>
+            <a:pPr algn="l" lvl="1">
+              <a:spcAft>
+                <a:spcPts val="100"/>
+              </a:spcAft>
+            </a:pPr>
+            <a:r>
+              <a:rPr sz="1200" b="1" i="0">
+                <a:solidFill>
+                  <a:srgbClr val="3AEDE5"/>
+                </a:solidFill>
+                <a:latin typeface="Alegreya Sans"/>
+              </a:rPr>
+              <a:t>•  </a:t>
+            </a:r>
+            <a:r>
+              <a:rPr sz="1200" b="0" i="0">
+                <a:solidFill>
+                  <a:srgbClr val="FFFFFF"/>
+                </a:solidFill>
+                <a:latin typeface="Alegreya Sans"/>
+              </a:rPr>
+              <a:t>Inside Training : pédagogie / éducation financière et Personal Branding pour dirigeants et équipes du secteur financier.</a:t>
+            </a:r>
+          </a:p>
+          <a:p>
+            <a:pPr algn="l">
+              <a:spcAft>
+                <a:spcPts val="100"/>
+              </a:spcAft>
+            </a:pPr>
+            <a:r>
+              <a:rPr sz="1200" b="1" i="0">
+                <a:solidFill>
+                  <a:srgbClr val="3AEDE5"/>
+                </a:solidFill>
+                <a:latin typeface="Alegreya Sans"/>
+              </a:rPr>
+              <a:t>▸ </a:t>
+            </a:r>
+            <a:r>
+              <a:rPr sz="1200" b="1" i="0">
+                <a:solidFill>
+                  <a:srgbClr val="FFFFFF"/>
+                </a:solidFill>
+                <a:latin typeface="Alegreya Sans"/>
+              </a:rPr>
+              <a:t>EY</a:t>
+            </a:r>
+            <a:r>
+              <a:rPr sz="1200" b="0" i="0">
+                <a:solidFill>
+                  <a:srgbClr val="FFFFFF"/>
+                </a:solidFill>
+                <a:latin typeface="Alegreya Sans"/>
+              </a:rPr>
+              <a:t> — Senior Consultant → Senior Manager</a:t>
+            </a:r>
+            <a:r>
+              <a:rPr sz="1200" b="0" i="1">
+                <a:solidFill>
+                  <a:srgbClr val="3AEDE5"/>
+                </a:solidFill>
+                <a:latin typeface="Alegreya Sans"/>
+              </a:rPr>
+              <a:t>  (Oct. 19 — Déc. 25)</a:t>
+            </a:r>
+          </a:p>
+          <a:p>
+            <a:pPr algn="l" lvl="1">
+              <a:spcAft>
+                <a:spcPts val="100"/>
+              </a:spcAft>
+            </a:pPr>
+            <a:r>
+              <a:rPr sz="1200" b="1" i="0">
+                <a:solidFill>
+                  <a:srgbClr val="3AEDE5"/>
+                </a:solidFill>
+                <a:latin typeface="Alegreya Sans"/>
+              </a:rPr>
+              <a:t>•  </a:t>
+            </a:r>
+            <a:r>
+              <a:rPr sz="1200" b="0" i="0">
+                <a:solidFill>
+                  <a:srgbClr val="FFFFFF"/>
+                </a:solidFill>
+                <a:latin typeface="Alegreya Sans"/>
+              </a:rPr>
+              <a:t>Refonte du processus de rating interne des contreparties (7 ETP) ; déploiement de modèles IRB dans le cadre d'un rachat de portefeuille (TOM…</a:t>
+            </a:r>
+          </a:p>
+          <a:p>
+            <a:pPr algn="l" lvl="1">
+              <a:spcAft>
+                <a:spcPts val="100"/>
+              </a:spcAft>
+            </a:pPr>
+            <a:r>
+              <a:rPr sz="1200" b="1" i="0">
+                <a:solidFill>
+                  <a:srgbClr val="3AEDE5"/>
+                </a:solidFill>
+                <a:latin typeface="Alegreya Sans"/>
+              </a:rPr>
+              <a:t>•  </a:t>
+            </a:r>
+            <a:r>
+              <a:rPr sz="1200" b="0" i="0">
+                <a:solidFill>
+                  <a:srgbClr val="FFFFFF"/>
+                </a:solidFill>
+                <a:latin typeface="Alegreya Sans"/>
+              </a:rPr>
+              <a:t>Pilotage de projets « risques digitaux » pour une G-SIB : mise en conformité EU AI Act, dispositif de gestion des risques.</a:t>
+            </a:r>
+          </a:p>
+          <a:p>
+            <a:pPr algn="l">
+              <a:spcAft>
+                <a:spcPts val="100"/>
+              </a:spcAft>
+            </a:pPr>
+            <a:r>
+              <a:rPr sz="1200" b="1" i="0">
+                <a:solidFill>
+                  <a:srgbClr val="3AEDE5"/>
+                </a:solidFill>
+                <a:latin typeface="Alegreya Sans"/>
+              </a:rPr>
+              <a:t>▸ </a:t>
+            </a:r>
+            <a:r>
+              <a:rPr sz="1200" b="1" i="0">
+                <a:solidFill>
+                  <a:srgbClr val="FFFFFF"/>
+                </a:solidFill>
+                <a:latin typeface="Alegreya Sans"/>
+              </a:rPr>
+              <a:t>PwC</a:t>
+            </a:r>
+            <a:r>
+              <a:rPr sz="1200" b="0" i="0">
+                <a:solidFill>
+                  <a:srgbClr val="FFFFFF"/>
+                </a:solidFill>
+                <a:latin typeface="Alegreya Sans"/>
+              </a:rPr>
+              <a:t> — Consultant Financial Services</a:t>
+            </a:r>
+            <a:r>
+              <a:rPr sz="1200" b="0" i="1">
+                <a:solidFill>
+                  <a:srgbClr val="3AEDE5"/>
+                </a:solidFill>
+                <a:latin typeface="Alegreya Sans"/>
+              </a:rPr>
+              <a:t>  (Sept. 17 — Oct. 19)</a:t>
+            </a:r>
+          </a:p>
+          <a:p>
+            <a:pPr algn="l" lvl="1">
+              <a:spcAft>
+                <a:spcPts val="100"/>
+              </a:spcAft>
+            </a:pPr>
+            <a:r>
+              <a:rPr sz="1200" b="1" i="0">
+                <a:solidFill>
+                  <a:srgbClr val="3AEDE5"/>
+                </a:solidFill>
+                <a:latin typeface="Alegreya Sans"/>
+              </a:rPr>
+              <a:t>•  </a:t>
+            </a:r>
+            <a:r>
+              <a:rPr sz="1200" b="0" i="0">
+                <a:solidFill>
+                  <a:srgbClr val="FFFFFF"/>
+                </a:solidFill>
+                <a:latin typeface="Alegreya Sans"/>
+              </a:rPr>
+              <a:t>Coordination d'une certification auprès du régulateur US pour une G-SIB française (10 entités).</a:t>
+            </a:r>
+          </a:p>
+          <a:p>
+            <a:pPr algn="l" lvl="1">
+              <a:spcAft>
+                <a:spcPts val="100"/>
+              </a:spcAft>
+            </a:pPr>
+            <a:r>
+              <a:rPr sz="1200" b="1" i="0">
+                <a:solidFill>
+                  <a:srgbClr val="3AEDE5"/>
+                </a:solidFill>
+                <a:latin typeface="Alegreya Sans"/>
+              </a:rPr>
+              <a:t>•  </a:t>
+            </a:r>
+            <a:r>
+              <a:rPr sz="1200" b="0" i="0">
+                <a:solidFill>
+                  <a:srgbClr val="FFFFFF"/>
+                </a:solidFill>
+                <a:latin typeface="Alegreya Sans"/>
+              </a:rPr>
+              <a:t>Élaboration de formations réglementaires déployées auprès de +8 000 collaborateurs.</a:t>
+            </a:r>
+          </a:p>
+          <a:p>
+            <a:pPr algn="l">
+              <a:spcAft>
+                <a:spcPts val="100"/>
+              </a:spcAft>
+            </a:pPr>
+            <a:r>
+              <a:rPr sz="1200" b="1" i="0">
+                <a:solidFill>
+                  <a:srgbClr val="3AEDE5"/>
+                </a:solidFill>
+                <a:latin typeface="Alegreya Sans"/>
+              </a:rPr>
+              <a:t>▸ </a:t>
+            </a:r>
+            <a:r>
+              <a:rPr sz="1200" b="1" i="0">
+                <a:solidFill>
+                  <a:srgbClr val="FFFFFF"/>
+                </a:solidFill>
+                <a:latin typeface="Alegreya Sans"/>
+              </a:rPr>
+              <a:t>Mazars</a:t>
+            </a:r>
+            <a:r>
+              <a:rPr sz="1200" b="0" i="0">
+                <a:solidFill>
+                  <a:srgbClr val="FFFFFF"/>
+                </a:solidFill>
+                <a:latin typeface="Alegreya Sans"/>
+              </a:rPr>
+              <a:t> — Consultant Financial Services</a:t>
+            </a:r>
+            <a:r>
+              <a:rPr sz="1200" b="0" i="1">
+                <a:solidFill>
+                  <a:srgbClr val="3AEDE5"/>
+                </a:solidFill>
+                <a:latin typeface="Alegreya Sans"/>
+              </a:rPr>
+              <a:t>  (Avril — Sept. 17)</a:t>
+            </a:r>
+          </a:p>
+          <a:p>
+            <a:pPr algn="l" lvl="1">
+              <a:spcAft>
+                <a:spcPts val="100"/>
+              </a:spcAft>
+            </a:pPr>
+            <a:r>
+              <a:rPr sz="1200" b="1" i="0">
+                <a:solidFill>
+                  <a:srgbClr val="3AEDE5"/>
+                </a:solidFill>
+                <a:latin typeface="Alegreya Sans"/>
+              </a:rPr>
+              <a:t>•  </a:t>
+            </a:r>
+            <a:r>
+              <a:rPr sz="1200" b="0" i="0">
+                <a:solidFill>
+                  <a:srgbClr val="FFFFFF"/>
+                </a:solidFill>
+                <a:latin typeface="Alegreya Sans"/>
+              </a:rPr>
+              <a:t>Définition et rédaction d'un Plan Préventif de Rétablissement (PPR) pour un groupe bancaire étranger : analyse stratégique, options de redre…</a:t>
+            </a:r>
+          </a:p>
+          <a:p>
+            <a:pPr algn="l">
+              <a:spcBef>
+                <a:spcPts val="600"/>
+              </a:spcBef>
+              <a:spcAft>
+                <a:spcPts val="300"/>
+              </a:spcAft>
+            </a:pPr>
+            <a:r>
+              <a:rPr sz="1300" b="1" i="0">
+                <a:solidFill>
+                  <a:srgbClr val="3AEDE5"/>
+                </a:solidFill>
+                <a:latin typeface="Alegreya Sans"/>
+              </a:rPr>
+              <a:t>RÉFÉRENCES</a:t>
+            </a:r>
+          </a:p>
+          <a:p>
+            <a:pPr algn="l">
+              <a:spcAft>
+                <a:spcPts val="200"/>
+              </a:spcAft>
+            </a:pPr>
+            <a:r>
+              <a:rPr sz="1200" b="0" i="1">
+                <a:solidFill>
+                  <a:srgbClr val="FFFFFF"/>
+                </a:solidFill>
+                <a:latin typeface="Alegreya Sans"/>
+              </a:rPr>
+              <a:t>G-SIB française, Banque Populaire (BPACA), EY, PwC, Mazars</a:t>
+            </a:r>
+          </a:p>
+        </p:txBody>
+      </p:sp>
+      <p:sp>
+        <p:nvSpPr>
+          <p:cNvPr id="9" name="Rectangle 8"/>
           <p:cNvSpPr/>
           <p:nvPr/>
         </p:nvSpPr>
@@ -3232,1057 +4272,6 @@
           </a:p>
         </p:txBody>
       </p:sp>
-      <p:pic>
-        <p:nvPicPr>
-          <p:cNvPr id="5" name="Picture 4" descr="inside_circle_logo.png"/>
-          <p:cNvPicPr>
-            <a:picLocks noChangeAspect="1"/>
-          </p:cNvPicPr>
-          <p:nvPr/>
-        </p:nvPicPr>
-        <p:blipFill>
-          <a:blip r:embed="rId2"/>
-          <a:stretch>
-            <a:fillRect/>
-          </a:stretch>
-        </p:blipFill>
-        <p:spPr>
-          <a:xfrm>
-            <a:off x="10660000" y="130000"/>
-            <a:ext cx="1302000" cy="420000"/>
-          </a:xfrm>
-          <a:prstGeom prst="rect">
-            <a:avLst/>
-          </a:prstGeom>
-        </p:spPr>
-      </p:pic>
-      <p:sp>
-        <p:nvSpPr>
-          <p:cNvPr id="6" name="TextBox 5"/>
-          <p:cNvSpPr txBox="1"/>
-          <p:nvPr/>
-        </p:nvSpPr>
-        <p:spPr>
-          <a:xfrm>
-            <a:off x="228600" y="260000"/>
-            <a:ext cx="3842800" cy="800000"/>
-          </a:xfrm>
-          <a:prstGeom prst="rect">
-            <a:avLst/>
-          </a:prstGeom>
-          <a:noFill/>
-        </p:spPr>
-        <p:txBody>
-          <a:bodyPr wrap="square" lIns="0" rIns="0" tIns="0" bIns="0">
-            <a:spAutoFit/>
-          </a:bodyPr>
-          <a:lstStyle/>
-          <a:p>
-            <a:pPr algn="l"/>
-            <a:r>
-              <a:rPr sz="4800" b="1" i="0">
-                <a:solidFill>
-                  <a:srgbClr val="3AEDE5"/>
-                </a:solidFill>
-                <a:latin typeface="Alegreya Sans"/>
-              </a:rPr>
-              <a:t>R.M.</a:t>
-            </a:r>
-          </a:p>
-        </p:txBody>
-      </p:sp>
-      <p:sp>
-        <p:nvSpPr>
-          <p:cNvPr id="7" name="TextBox 6"/>
-          <p:cNvSpPr txBox="1"/>
-          <p:nvPr/>
-        </p:nvSpPr>
-        <p:spPr>
-          <a:xfrm>
-            <a:off x="4528600" y="300000"/>
-            <a:ext cx="5963400" cy="800000"/>
-          </a:xfrm>
-          <a:prstGeom prst="rect">
-            <a:avLst/>
-          </a:prstGeom>
-          <a:noFill/>
-        </p:spPr>
-        <p:txBody>
-          <a:bodyPr wrap="square" lIns="0" rIns="0" tIns="0" bIns="0">
-            <a:spAutoFit/>
-          </a:bodyPr>
-          <a:lstStyle/>
-          <a:p>
-            <a:r>
-              <a:rPr sz="2400" b="1" i="0">
-                <a:solidFill>
-                  <a:srgbClr val="FFFFFF"/>
-                </a:solidFill>
-                <a:latin typeface="Alegreya Sans"/>
-              </a:rPr>
-              <a:t>Consultant Senior — Risk &amp; Regulatory</a:t>
-            </a:r>
-          </a:p>
-          <a:p>
-            <a:pPr>
-              <a:spcBef>
-                <a:spcPts val="200"/>
-              </a:spcBef>
-            </a:pPr>
-            <a:r>
-              <a:rPr sz="1500" b="0" i="1">
-                <a:solidFill>
-                  <a:srgbClr val="3AEDE5"/>
-                </a:solidFill>
-                <a:latin typeface="Alegreya Sans"/>
-              </a:rPr>
-              <a:t>Banque &amp; CIB — Transformation réglementaire</a:t>
-            </a:r>
-          </a:p>
-        </p:txBody>
-      </p:sp>
-      <p:sp>
-        <p:nvSpPr>
-          <p:cNvPr id="8" name="TextBox 7"/>
-          <p:cNvSpPr txBox="1"/>
-          <p:nvPr/>
-        </p:nvSpPr>
-        <p:spPr>
-          <a:xfrm>
-            <a:off x="228600" y="1180000"/>
-            <a:ext cx="3842800" cy="5318000"/>
-          </a:xfrm>
-          <a:prstGeom prst="rect">
-            <a:avLst/>
-          </a:prstGeom>
-          <a:noFill/>
-        </p:spPr>
-        <p:txBody>
-          <a:bodyPr wrap="square" lIns="0" rIns="0" tIns="0" bIns="0">
-            <a:spAutoFit/>
-          </a:bodyPr>
-          <a:lstStyle/>
-          <a:p>
-            <a:pPr algn="l">
-              <a:spcAft>
-                <a:spcPts val="300"/>
-              </a:spcAft>
-            </a:pPr>
-            <a:r>
-              <a:rPr sz="1300" b="1" i="0">
-                <a:solidFill>
-                  <a:srgbClr val="3AEDE5"/>
-                </a:solidFill>
-                <a:latin typeface="Alegreya Sans"/>
-              </a:rPr>
-              <a:t>DOMAINES D'EXPERTISE</a:t>
-            </a:r>
-          </a:p>
-          <a:p>
-            <a:pPr algn="l">
-              <a:spcAft>
-                <a:spcPts val="100"/>
-              </a:spcAft>
-            </a:pPr>
-            <a:r>
-              <a:rPr sz="1200" b="1" i="0">
-                <a:solidFill>
-                  <a:srgbClr val="3AEDE5"/>
-                </a:solidFill>
-                <a:latin typeface="Alegreya Sans"/>
-              </a:rPr>
-              <a:t>•  </a:t>
-            </a:r>
-            <a:r>
-              <a:rPr sz="1200" b="0" i="0">
-                <a:solidFill>
-                  <a:srgbClr val="FFFFFF"/>
-                </a:solidFill>
-                <a:latin typeface="Alegreya Sans"/>
-              </a:rPr>
-              <a:t>Risk &amp; Regulatory</a:t>
-            </a:r>
-          </a:p>
-          <a:p>
-            <a:pPr algn="l">
-              <a:spcAft>
-                <a:spcPts val="100"/>
-              </a:spcAft>
-            </a:pPr>
-            <a:r>
-              <a:rPr sz="1200" b="1" i="0">
-                <a:solidFill>
-                  <a:srgbClr val="3AEDE5"/>
-                </a:solidFill>
-                <a:latin typeface="Alegreya Sans"/>
-              </a:rPr>
-              <a:t>•  </a:t>
-            </a:r>
-            <a:r>
-              <a:rPr sz="1200" b="0" i="0">
-                <a:solidFill>
-                  <a:srgbClr val="FFFFFF"/>
-                </a:solidFill>
-                <a:latin typeface="Alegreya Sans"/>
-              </a:rPr>
-              <a:t>Transformation bancaire (CIB / Retail)</a:t>
-            </a:r>
-          </a:p>
-          <a:p>
-            <a:pPr algn="l">
-              <a:spcAft>
-                <a:spcPts val="100"/>
-              </a:spcAft>
-            </a:pPr>
-            <a:r>
-              <a:rPr sz="1200" b="1" i="0">
-                <a:solidFill>
-                  <a:srgbClr val="3AEDE5"/>
-                </a:solidFill>
-                <a:latin typeface="Alegreya Sans"/>
-              </a:rPr>
-              <a:t>•  </a:t>
-            </a:r>
-            <a:r>
-              <a:rPr sz="1200" b="0" i="0">
-                <a:solidFill>
-                  <a:srgbClr val="FFFFFF"/>
-                </a:solidFill>
-                <a:latin typeface="Alegreya Sans"/>
-              </a:rPr>
-              <a:t>Modèles IRB &amp; Risque de crédit</a:t>
-            </a:r>
-          </a:p>
-          <a:p>
-            <a:pPr algn="l">
-              <a:spcAft>
-                <a:spcPts val="100"/>
-              </a:spcAft>
-            </a:pPr>
-            <a:r>
-              <a:rPr sz="1200" b="1" i="0">
-                <a:solidFill>
-                  <a:srgbClr val="3AEDE5"/>
-                </a:solidFill>
-                <a:latin typeface="Alegreya Sans"/>
-              </a:rPr>
-              <a:t>•  </a:t>
-            </a:r>
-            <a:r>
-              <a:rPr sz="1200" b="0" i="0">
-                <a:solidFill>
-                  <a:srgbClr val="FFFFFF"/>
-                </a:solidFill>
-                <a:latin typeface="Alegreya Sans"/>
-              </a:rPr>
-              <a:t>CRR 3 — Recovery &amp; Resolution</a:t>
-            </a:r>
-          </a:p>
-          <a:p>
-            <a:pPr algn="l">
-              <a:spcAft>
-                <a:spcPts val="100"/>
-              </a:spcAft>
-            </a:pPr>
-            <a:r>
-              <a:rPr sz="1200" b="1" i="0">
-                <a:solidFill>
-                  <a:srgbClr val="3AEDE5"/>
-                </a:solidFill>
-                <a:latin typeface="Alegreya Sans"/>
-              </a:rPr>
-              <a:t>•  </a:t>
-            </a:r>
-            <a:r>
-              <a:rPr sz="1200" b="0" i="0">
-                <a:solidFill>
-                  <a:srgbClr val="FFFFFF"/>
-                </a:solidFill>
-                <a:latin typeface="Alegreya Sans"/>
-              </a:rPr>
-              <a:t>Gouvernance des risques digitaux (AI Act)</a:t>
-            </a:r>
-          </a:p>
-          <a:p>
-            <a:pPr algn="l">
-              <a:spcBef>
-                <a:spcPts val="600"/>
-              </a:spcBef>
-              <a:spcAft>
-                <a:spcPts val="300"/>
-              </a:spcAft>
-            </a:pPr>
-            <a:r>
-              <a:rPr sz="1300" b="1" i="0">
-                <a:solidFill>
-                  <a:srgbClr val="3AEDE5"/>
-                </a:solidFill>
-                <a:latin typeface="Alegreya Sans"/>
-              </a:rPr>
-              <a:t>LANGUES</a:t>
-            </a:r>
-          </a:p>
-          <a:p>
-            <a:pPr algn="l">
-              <a:spcAft>
-                <a:spcPts val="100"/>
-              </a:spcAft>
-            </a:pPr>
-            <a:r>
-              <a:rPr sz="1200" b="1" i="0">
-                <a:solidFill>
-                  <a:srgbClr val="3AEDE5"/>
-                </a:solidFill>
-                <a:latin typeface="Alegreya Sans"/>
-              </a:rPr>
-              <a:t>•  </a:t>
-            </a:r>
-            <a:r>
-              <a:rPr sz="1200" b="0" i="0">
-                <a:solidFill>
-                  <a:srgbClr val="FFFFFF"/>
-                </a:solidFill>
-                <a:latin typeface="Alegreya Sans"/>
-              </a:rPr>
-              <a:t>Français — Langue maternelle</a:t>
-            </a:r>
-          </a:p>
-          <a:p>
-            <a:pPr algn="l">
-              <a:spcAft>
-                <a:spcPts val="100"/>
-              </a:spcAft>
-            </a:pPr>
-            <a:r>
-              <a:rPr sz="1200" b="1" i="0">
-                <a:solidFill>
-                  <a:srgbClr val="3AEDE5"/>
-                </a:solidFill>
-                <a:latin typeface="Alegreya Sans"/>
-              </a:rPr>
-              <a:t>•  </a:t>
-            </a:r>
-            <a:r>
-              <a:rPr sz="1200" b="0" i="0">
-                <a:solidFill>
-                  <a:srgbClr val="FFFFFF"/>
-                </a:solidFill>
-                <a:latin typeface="Alegreya Sans"/>
-              </a:rPr>
-              <a:t>Anglais — Courant</a:t>
-            </a:r>
-          </a:p>
-          <a:p>
-            <a:pPr algn="l">
-              <a:spcAft>
-                <a:spcPts val="100"/>
-              </a:spcAft>
-            </a:pPr>
-            <a:r>
-              <a:rPr sz="1200" b="1" i="0">
-                <a:solidFill>
-                  <a:srgbClr val="3AEDE5"/>
-                </a:solidFill>
-                <a:latin typeface="Alegreya Sans"/>
-              </a:rPr>
-              <a:t>•  </a:t>
-            </a:r>
-            <a:r>
-              <a:rPr sz="1200" b="0" i="0">
-                <a:solidFill>
-                  <a:srgbClr val="FFFFFF"/>
-                </a:solidFill>
-                <a:latin typeface="Alegreya Sans"/>
-              </a:rPr>
-              <a:t>Espagnol — Bases</a:t>
-            </a:r>
-          </a:p>
-          <a:p>
-            <a:pPr algn="l">
-              <a:spcBef>
-                <a:spcPts val="600"/>
-              </a:spcBef>
-              <a:spcAft>
-                <a:spcPts val="300"/>
-              </a:spcAft>
-            </a:pPr>
-            <a:r>
-              <a:rPr sz="1300" b="1" i="0">
-                <a:solidFill>
-                  <a:srgbClr val="3AEDE5"/>
-                </a:solidFill>
-                <a:latin typeface="Alegreya Sans"/>
-              </a:rPr>
-              <a:t>FORMATION &amp; CERTIFICATIONS</a:t>
-            </a:r>
-          </a:p>
-          <a:p>
-            <a:pPr algn="l">
-              <a:spcAft>
-                <a:spcPts val="100"/>
-              </a:spcAft>
-            </a:pPr>
-            <a:r>
-              <a:rPr sz="1200" b="1" i="0">
-                <a:solidFill>
-                  <a:srgbClr val="3AEDE5"/>
-                </a:solidFill>
-                <a:latin typeface="Alegreya Sans"/>
-              </a:rPr>
-              <a:t>2016 — 2017  </a:t>
-            </a:r>
-            <a:r>
-              <a:rPr sz="1200" b="1" i="0">
-                <a:solidFill>
-                  <a:srgbClr val="FFFFFF"/>
-                </a:solidFill>
-                <a:latin typeface="Alegreya Sans"/>
-              </a:rPr>
-              <a:t>Paris 1 Panthéon-Sorbonne</a:t>
-            </a:r>
-          </a:p>
-          <a:p>
-            <a:pPr algn="l">
-              <a:spcAft>
-                <a:spcPts val="300"/>
-              </a:spcAft>
-            </a:pPr>
-            <a:r>
-              <a:rPr sz="1200" b="0" i="1">
-                <a:solidFill>
-                  <a:srgbClr val="CCD6E8"/>
-                </a:solidFill>
-                <a:latin typeface="Alegreya Sans"/>
-              </a:rPr>
-              <a:t>Master 2 Banque &amp; Finance</a:t>
-            </a:r>
-          </a:p>
-          <a:p>
-            <a:pPr algn="l">
-              <a:spcAft>
-                <a:spcPts val="100"/>
-              </a:spcAft>
-            </a:pPr>
-            <a:r>
-              <a:rPr sz="1200" b="1" i="0">
-                <a:solidFill>
-                  <a:srgbClr val="3AEDE5"/>
-                </a:solidFill>
-                <a:latin typeface="Alegreya Sans"/>
-              </a:rPr>
-              <a:t>2013 — 2016  </a:t>
-            </a:r>
-            <a:r>
-              <a:rPr sz="1200" b="1" i="0">
-                <a:solidFill>
-                  <a:srgbClr val="FFFFFF"/>
-                </a:solidFill>
-                <a:latin typeface="Alegreya Sans"/>
-              </a:rPr>
-              <a:t>Bordeaux / Tampere</a:t>
-            </a:r>
-          </a:p>
-          <a:p>
-            <a:pPr algn="l">
-              <a:spcAft>
-                <a:spcPts val="300"/>
-              </a:spcAft>
-            </a:pPr>
-            <a:r>
-              <a:rPr sz="1200" b="0" i="1">
-                <a:solidFill>
-                  <a:srgbClr val="CCD6E8"/>
-                </a:solidFill>
-                <a:latin typeface="Alegreya Sans"/>
-              </a:rPr>
-              <a:t>Magistère d'Économie &amp; Finance Internati…</a:t>
-            </a:r>
-          </a:p>
-          <a:p>
-            <a:pPr algn="l">
-              <a:spcAft>
-                <a:spcPts val="100"/>
-              </a:spcAft>
-            </a:pPr>
-            <a:r>
-              <a:rPr sz="1200" b="1" i="0">
-                <a:solidFill>
-                  <a:srgbClr val="3AEDE5"/>
-                </a:solidFill>
-                <a:latin typeface="Alegreya Sans"/>
-              </a:rPr>
-              <a:t>2012 — 2013  </a:t>
-            </a:r>
-            <a:r>
-              <a:rPr sz="1200" b="1" i="0">
-                <a:solidFill>
-                  <a:srgbClr val="FFFFFF"/>
-                </a:solidFill>
-                <a:latin typeface="Alegreya Sans"/>
-              </a:rPr>
-              <a:t>Lycée Michel Montaigne</a:t>
-            </a:r>
-          </a:p>
-          <a:p>
-            <a:pPr algn="l">
-              <a:spcAft>
-                <a:spcPts val="300"/>
-              </a:spcAft>
-            </a:pPr>
-            <a:r>
-              <a:rPr sz="1200" b="0" i="1">
-                <a:solidFill>
-                  <a:srgbClr val="CCD6E8"/>
-                </a:solidFill>
-                <a:latin typeface="Alegreya Sans"/>
-              </a:rPr>
-              <a:t>Prépa HEC, voie ECE</a:t>
-            </a:r>
-          </a:p>
-          <a:p>
-            <a:pPr algn="l">
-              <a:spcBef>
-                <a:spcPts val="600"/>
-              </a:spcBef>
-              <a:spcAft>
-                <a:spcPts val="300"/>
-              </a:spcAft>
-            </a:pPr>
-            <a:r>
-              <a:rPr sz="1300" b="1" i="0">
-                <a:solidFill>
-                  <a:srgbClr val="3AEDE5"/>
-                </a:solidFill>
-                <a:latin typeface="Alegreya Sans"/>
-              </a:rPr>
-              <a:t>ENGAGEMENTS &amp; RÉALISATIONS</a:t>
-            </a:r>
-          </a:p>
-          <a:p>
-            <a:pPr algn="l">
-              <a:spcAft>
-                <a:spcPts val="200"/>
-              </a:spcAft>
-            </a:pPr>
-            <a:r>
-              <a:rPr sz="1200" b="1" i="0">
-                <a:solidFill>
-                  <a:srgbClr val="3AEDE5"/>
-                </a:solidFill>
-                <a:latin typeface="Alegreya Sans"/>
-              </a:rPr>
-              <a:t>• </a:t>
-            </a:r>
-            <a:r>
-              <a:rPr sz="1200" b="1" i="0">
-                <a:solidFill>
-                  <a:srgbClr val="FFFFFF"/>
-                </a:solidFill>
-                <a:latin typeface="Alegreya Sans"/>
-              </a:rPr>
-              <a:t>Auteur</a:t>
-            </a:r>
-            <a:r>
-              <a:rPr sz="1200" b="0" i="1">
-                <a:solidFill>
-                  <a:srgbClr val="CCD6E8"/>
-                </a:solidFill>
-                <a:latin typeface="Alegreya Sans"/>
-              </a:rPr>
-              <a:t> — Lettre réglementaire banque EY Fran…</a:t>
-            </a:r>
-          </a:p>
-          <a:p>
-            <a:pPr algn="l">
-              <a:spcAft>
-                <a:spcPts val="200"/>
-              </a:spcAft>
-            </a:pPr>
-            <a:r>
-              <a:rPr sz="1200" b="1" i="0">
-                <a:solidFill>
-                  <a:srgbClr val="3AEDE5"/>
-                </a:solidFill>
-                <a:latin typeface="Alegreya Sans"/>
-              </a:rPr>
-              <a:t>• </a:t>
-            </a:r>
-            <a:r>
-              <a:rPr sz="1200" b="1" i="0">
-                <a:solidFill>
-                  <a:srgbClr val="FFFFFF"/>
-                </a:solidFill>
-                <a:latin typeface="Alegreya Sans"/>
-              </a:rPr>
-              <a:t>Référent G-SIB</a:t>
-            </a:r>
-            <a:r>
-              <a:rPr sz="1200" b="0" i="1">
-                <a:solidFill>
-                  <a:srgbClr val="CCD6E8"/>
-                </a:solidFill>
-                <a:latin typeface="Alegreya Sans"/>
-              </a:rPr>
-              <a:t> — 2 comptes prioritaires Risk &amp; Regul…</a:t>
-            </a:r>
-          </a:p>
-          <a:p>
-            <a:pPr algn="l">
-              <a:spcAft>
-                <a:spcPts val="200"/>
-              </a:spcAft>
-            </a:pPr>
-            <a:r>
-              <a:rPr sz="1200" b="1" i="0">
-                <a:solidFill>
-                  <a:srgbClr val="3AEDE5"/>
-                </a:solidFill>
-                <a:latin typeface="Alegreya Sans"/>
-              </a:rPr>
-              <a:t>• </a:t>
-            </a:r>
-            <a:r>
-              <a:rPr sz="1200" b="1" i="0">
-                <a:solidFill>
-                  <a:srgbClr val="FFFFFF"/>
-                </a:solidFill>
-                <a:latin typeface="Alegreya Sans"/>
-              </a:rPr>
-              <a:t>Création de contenu</a:t>
-            </a:r>
-            <a:r>
-              <a:rPr sz="1200" b="0" i="1">
-                <a:solidFill>
-                  <a:srgbClr val="CCD6E8"/>
-                </a:solidFill>
-                <a:latin typeface="Alegreya Sans"/>
-              </a:rPr>
-              <a:t> — Podcast &amp; newsletter financiers</a:t>
-            </a:r>
-          </a:p>
-        </p:txBody>
-      </p:sp>
-      <p:sp>
-        <p:nvSpPr>
-          <p:cNvPr id="9" name="TextBox 8"/>
-          <p:cNvSpPr txBox="1"/>
-          <p:nvPr/>
-        </p:nvSpPr>
-        <p:spPr>
-          <a:xfrm>
-            <a:off x="4528600" y="1180000"/>
-            <a:ext cx="7434800" cy="5318000"/>
-          </a:xfrm>
-          <a:prstGeom prst="rect">
-            <a:avLst/>
-          </a:prstGeom>
-          <a:noFill/>
-        </p:spPr>
-        <p:txBody>
-          <a:bodyPr wrap="square" lIns="0" rIns="0" tIns="0" bIns="0">
-            <a:spAutoFit/>
-          </a:bodyPr>
-          <a:lstStyle/>
-          <a:p>
-            <a:pPr algn="l">
-              <a:spcAft>
-                <a:spcPts val="300"/>
-              </a:spcAft>
-            </a:pPr>
-            <a:r>
-              <a:rPr sz="1300" b="1" i="0">
-                <a:solidFill>
-                  <a:srgbClr val="3AEDE5"/>
-                </a:solidFill>
-                <a:latin typeface="Alegreya Sans"/>
-              </a:rPr>
-              <a:t>EXPÉRIENCE PROFESSIONNELLE</a:t>
-            </a:r>
-          </a:p>
-          <a:p>
-            <a:pPr algn="l">
-              <a:spcAft>
-                <a:spcPts val="100"/>
-              </a:spcAft>
-            </a:pPr>
-            <a:r>
-              <a:rPr sz="1200" b="1" i="0">
-                <a:solidFill>
-                  <a:srgbClr val="3AEDE5"/>
-                </a:solidFill>
-                <a:latin typeface="Alegreya Sans"/>
-              </a:rPr>
-              <a:t>▸ </a:t>
-            </a:r>
-            <a:r>
-              <a:rPr sz="1200" b="1" i="0">
-                <a:solidFill>
-                  <a:srgbClr val="FFFFFF"/>
-                </a:solidFill>
-                <a:latin typeface="Alegreya Sans"/>
-              </a:rPr>
-              <a:t>Inside (Inside Circle, Inside Banking, Inside Training)</a:t>
-            </a:r>
-            <a:r>
-              <a:rPr sz="1200" b="0" i="0">
-                <a:solidFill>
-                  <a:srgbClr val="FFFFFF"/>
-                </a:solidFill>
-                <a:latin typeface="Alegreya Sans"/>
-              </a:rPr>
-              <a:t> — Fondateur — Consultant indépendant</a:t>
-            </a:r>
-            <a:r>
-              <a:rPr sz="1200" b="0" i="1">
-                <a:solidFill>
-                  <a:srgbClr val="3AEDE5"/>
-                </a:solidFill>
-                <a:latin typeface="Alegreya Sans"/>
-              </a:rPr>
-              <a:t>  (Depuis Jan. 26)</a:t>
-            </a:r>
-          </a:p>
-          <a:p>
-            <a:pPr algn="l" lvl="1">
-              <a:spcAft>
-                <a:spcPts val="100"/>
-              </a:spcAft>
-            </a:pPr>
-            <a:r>
-              <a:rPr sz="1200" b="1" i="0">
-                <a:solidFill>
-                  <a:srgbClr val="3AEDE5"/>
-                </a:solidFill>
-                <a:latin typeface="Alegreya Sans"/>
-              </a:rPr>
-              <a:t>•  </a:t>
-            </a:r>
-            <a:r>
-              <a:rPr sz="1200" b="0" i="0">
-                <a:solidFill>
-                  <a:srgbClr val="FFFFFF"/>
-                </a:solidFill>
-                <a:latin typeface="Alegreya Sans"/>
-              </a:rPr>
-              <a:t>Communauté de freelances du secteur financier (banque, assurance, AM) ; média indépendant (2,5M vues 2025, podcast +50K écoutes, newsletter…</a:t>
-            </a:r>
-          </a:p>
-          <a:p>
-            <a:pPr algn="l" lvl="1">
-              <a:spcAft>
-                <a:spcPts val="100"/>
-              </a:spcAft>
-            </a:pPr>
-            <a:r>
-              <a:rPr sz="1200" b="1" i="0">
-                <a:solidFill>
-                  <a:srgbClr val="3AEDE5"/>
-                </a:solidFill>
-                <a:latin typeface="Alegreya Sans"/>
-              </a:rPr>
-              <a:t>•  </a:t>
-            </a:r>
-            <a:r>
-              <a:rPr sz="1200" b="0" i="0">
-                <a:solidFill>
-                  <a:srgbClr val="FFFFFF"/>
-                </a:solidFill>
-                <a:latin typeface="Alegreya Sans"/>
-              </a:rPr>
-              <a:t>Inside Training : pédagogie / éducation financière et Personal Branding pour dirigeants et équipes du secteur financier.</a:t>
-            </a:r>
-          </a:p>
-          <a:p>
-            <a:pPr algn="l">
-              <a:spcAft>
-                <a:spcPts val="100"/>
-              </a:spcAft>
-            </a:pPr>
-            <a:r>
-              <a:rPr sz="1200" b="1" i="0">
-                <a:solidFill>
-                  <a:srgbClr val="3AEDE5"/>
-                </a:solidFill>
-                <a:latin typeface="Alegreya Sans"/>
-              </a:rPr>
-              <a:t>▸ </a:t>
-            </a:r>
-            <a:r>
-              <a:rPr sz="1200" b="1" i="0">
-                <a:solidFill>
-                  <a:srgbClr val="FFFFFF"/>
-                </a:solidFill>
-                <a:latin typeface="Alegreya Sans"/>
-              </a:rPr>
-              <a:t>EY</a:t>
-            </a:r>
-            <a:r>
-              <a:rPr sz="1200" b="0" i="0">
-                <a:solidFill>
-                  <a:srgbClr val="FFFFFF"/>
-                </a:solidFill>
-                <a:latin typeface="Alegreya Sans"/>
-              </a:rPr>
-              <a:t> — Senior Consultant → Senior Manager</a:t>
-            </a:r>
-            <a:r>
-              <a:rPr sz="1200" b="0" i="1">
-                <a:solidFill>
-                  <a:srgbClr val="3AEDE5"/>
-                </a:solidFill>
-                <a:latin typeface="Alegreya Sans"/>
-              </a:rPr>
-              <a:t>  (Oct. 19 — Déc. 25)</a:t>
-            </a:r>
-          </a:p>
-          <a:p>
-            <a:pPr algn="l" lvl="1">
-              <a:spcAft>
-                <a:spcPts val="100"/>
-              </a:spcAft>
-            </a:pPr>
-            <a:r>
-              <a:rPr sz="1200" b="1" i="0">
-                <a:solidFill>
-                  <a:srgbClr val="3AEDE5"/>
-                </a:solidFill>
-                <a:latin typeface="Alegreya Sans"/>
-              </a:rPr>
-              <a:t>•  </a:t>
-            </a:r>
-            <a:r>
-              <a:rPr sz="1200" b="0" i="0">
-                <a:solidFill>
-                  <a:srgbClr val="FFFFFF"/>
-                </a:solidFill>
-                <a:latin typeface="Alegreya Sans"/>
-              </a:rPr>
-              <a:t>Refonte du processus de rating interne des contreparties (7 ETP) ; déploiement de modèles IRB dans le cadre d'un rachat de portefeuille (TOM…</a:t>
-            </a:r>
-          </a:p>
-          <a:p>
-            <a:pPr algn="l" lvl="1">
-              <a:spcAft>
-                <a:spcPts val="100"/>
-              </a:spcAft>
-            </a:pPr>
-            <a:r>
-              <a:rPr sz="1200" b="1" i="0">
-                <a:solidFill>
-                  <a:srgbClr val="3AEDE5"/>
-                </a:solidFill>
-                <a:latin typeface="Alegreya Sans"/>
-              </a:rPr>
-              <a:t>•  </a:t>
-            </a:r>
-            <a:r>
-              <a:rPr sz="1200" b="0" i="0">
-                <a:solidFill>
-                  <a:srgbClr val="FFFFFF"/>
-                </a:solidFill>
-                <a:latin typeface="Alegreya Sans"/>
-              </a:rPr>
-              <a:t>Pilotage de projets « risques digitaux » pour une G-SIB : mise en conformité EU AI Act, dispositif de gestion des risques.</a:t>
-            </a:r>
-          </a:p>
-          <a:p>
-            <a:pPr algn="l">
-              <a:spcAft>
-                <a:spcPts val="100"/>
-              </a:spcAft>
-            </a:pPr>
-            <a:r>
-              <a:rPr sz="1200" b="1" i="0">
-                <a:solidFill>
-                  <a:srgbClr val="3AEDE5"/>
-                </a:solidFill>
-                <a:latin typeface="Alegreya Sans"/>
-              </a:rPr>
-              <a:t>▸ </a:t>
-            </a:r>
-            <a:r>
-              <a:rPr sz="1200" b="1" i="0">
-                <a:solidFill>
-                  <a:srgbClr val="FFFFFF"/>
-                </a:solidFill>
-                <a:latin typeface="Alegreya Sans"/>
-              </a:rPr>
-              <a:t>PwC</a:t>
-            </a:r>
-            <a:r>
-              <a:rPr sz="1200" b="0" i="0">
-                <a:solidFill>
-                  <a:srgbClr val="FFFFFF"/>
-                </a:solidFill>
-                <a:latin typeface="Alegreya Sans"/>
-              </a:rPr>
-              <a:t> — Consultant Financial Services</a:t>
-            </a:r>
-            <a:r>
-              <a:rPr sz="1200" b="0" i="1">
-                <a:solidFill>
-                  <a:srgbClr val="3AEDE5"/>
-                </a:solidFill>
-                <a:latin typeface="Alegreya Sans"/>
-              </a:rPr>
-              <a:t>  (Sept. 17 — Oct. 19)</a:t>
-            </a:r>
-          </a:p>
-          <a:p>
-            <a:pPr algn="l" lvl="1">
-              <a:spcAft>
-                <a:spcPts val="100"/>
-              </a:spcAft>
-            </a:pPr>
-            <a:r>
-              <a:rPr sz="1200" b="1" i="0">
-                <a:solidFill>
-                  <a:srgbClr val="3AEDE5"/>
-                </a:solidFill>
-                <a:latin typeface="Alegreya Sans"/>
-              </a:rPr>
-              <a:t>•  </a:t>
-            </a:r>
-            <a:r>
-              <a:rPr sz="1200" b="0" i="0">
-                <a:solidFill>
-                  <a:srgbClr val="FFFFFF"/>
-                </a:solidFill>
-                <a:latin typeface="Alegreya Sans"/>
-              </a:rPr>
-              <a:t>Coordination d'une certification auprès du régulateur US pour une G-SIB française (10 entités).</a:t>
-            </a:r>
-          </a:p>
-          <a:p>
-            <a:pPr algn="l" lvl="1">
-              <a:spcAft>
-                <a:spcPts val="100"/>
-              </a:spcAft>
-            </a:pPr>
-            <a:r>
-              <a:rPr sz="1200" b="1" i="0">
-                <a:solidFill>
-                  <a:srgbClr val="3AEDE5"/>
-                </a:solidFill>
-                <a:latin typeface="Alegreya Sans"/>
-              </a:rPr>
-              <a:t>•  </a:t>
-            </a:r>
-            <a:r>
-              <a:rPr sz="1200" b="0" i="0">
-                <a:solidFill>
-                  <a:srgbClr val="FFFFFF"/>
-                </a:solidFill>
-                <a:latin typeface="Alegreya Sans"/>
-              </a:rPr>
-              <a:t>Élaboration de formations réglementaires déployées auprès de +8 000 collaborateurs.</a:t>
-            </a:r>
-          </a:p>
-          <a:p>
-            <a:pPr algn="l">
-              <a:spcAft>
-                <a:spcPts val="100"/>
-              </a:spcAft>
-            </a:pPr>
-            <a:r>
-              <a:rPr sz="1200" b="1" i="0">
-                <a:solidFill>
-                  <a:srgbClr val="3AEDE5"/>
-                </a:solidFill>
-                <a:latin typeface="Alegreya Sans"/>
-              </a:rPr>
-              <a:t>▸ </a:t>
-            </a:r>
-            <a:r>
-              <a:rPr sz="1200" b="1" i="0">
-                <a:solidFill>
-                  <a:srgbClr val="FFFFFF"/>
-                </a:solidFill>
-                <a:latin typeface="Alegreya Sans"/>
-              </a:rPr>
-              <a:t>Mazars</a:t>
-            </a:r>
-            <a:r>
-              <a:rPr sz="1200" b="0" i="0">
-                <a:solidFill>
-                  <a:srgbClr val="FFFFFF"/>
-                </a:solidFill>
-                <a:latin typeface="Alegreya Sans"/>
-              </a:rPr>
-              <a:t> — Consultant Financial Services</a:t>
-            </a:r>
-            <a:r>
-              <a:rPr sz="1200" b="0" i="1">
-                <a:solidFill>
-                  <a:srgbClr val="3AEDE5"/>
-                </a:solidFill>
-                <a:latin typeface="Alegreya Sans"/>
-              </a:rPr>
-              <a:t>  (Avril — Sept. 17)</a:t>
-            </a:r>
-          </a:p>
-          <a:p>
-            <a:pPr algn="l" lvl="1">
-              <a:spcAft>
-                <a:spcPts val="100"/>
-              </a:spcAft>
-            </a:pPr>
-            <a:r>
-              <a:rPr sz="1200" b="1" i="0">
-                <a:solidFill>
-                  <a:srgbClr val="3AEDE5"/>
-                </a:solidFill>
-                <a:latin typeface="Alegreya Sans"/>
-              </a:rPr>
-              <a:t>•  </a:t>
-            </a:r>
-            <a:r>
-              <a:rPr sz="1200" b="0" i="0">
-                <a:solidFill>
-                  <a:srgbClr val="FFFFFF"/>
-                </a:solidFill>
-                <a:latin typeface="Alegreya Sans"/>
-              </a:rPr>
-              <a:t>Définition et rédaction d'un Plan Préventif de Rétablissement (PPR) pour un groupe bancaire étranger : analyse stratégique, options de redre…</a:t>
-            </a:r>
-          </a:p>
-          <a:p>
-            <a:pPr algn="l">
-              <a:spcBef>
-                <a:spcPts val="600"/>
-              </a:spcBef>
-              <a:spcAft>
-                <a:spcPts val="300"/>
-              </a:spcAft>
-            </a:pPr>
-            <a:r>
-              <a:rPr sz="1300" b="1" i="0">
-                <a:solidFill>
-                  <a:srgbClr val="3AEDE5"/>
-                </a:solidFill>
-                <a:latin typeface="Alegreya Sans"/>
-              </a:rPr>
-              <a:t>RÉFÉRENCES</a:t>
-            </a:r>
-          </a:p>
-          <a:p>
-            <a:pPr algn="l">
-              <a:spcAft>
-                <a:spcPts val="200"/>
-              </a:spcAft>
-            </a:pPr>
-            <a:r>
-              <a:rPr sz="1200" b="0" i="1">
-                <a:solidFill>
-                  <a:srgbClr val="FFFFFF"/>
-                </a:solidFill>
-                <a:latin typeface="Alegreya Sans"/>
-              </a:rPr>
-              <a:t>G-SIB française, Banque Populaire (BPACA), EY, PwC, Mazars</a:t>
-            </a:r>
-          </a:p>
-        </p:txBody>
-      </p:sp>
       <p:sp>
         <p:nvSpPr>
           <p:cNvPr id="10" name="TextBox 9"/>
@@ -4346,61 +4335,6 @@
           <a:xfrm>
             <a:off x="0" y="0"/>
             <a:ext cx="12192000" cy="6858000"/>
-          </a:xfrm>
-          <a:prstGeom prst="rect">
-            <a:avLst/>
-          </a:prstGeom>
-          <a:ln>
-            <a:noFill/>
-          </a:ln>
-          <a:effectLst/>
-          <a:gradFill flip="none" rotWithShape="1">
-            <a:gsLst>
-              <a:gs pos="0">
-                <a:srgbClr val="07227A"/>
-              </a:gs>
-              <a:gs pos="85000">
-                <a:srgbClr val="07227A"/>
-              </a:gs>
-              <a:gs pos="100000">
-                <a:srgbClr val="1FCBD9"/>
-              </a:gs>
-            </a:gsLst>
-            <a:lin ang="2700000" scaled="0"/>
-          </a:gradFill>
-        </p:spPr>
-        <p:style>
-          <a:lnRef idx="1">
-            <a:schemeClr val="accent1"/>
-          </a:lnRef>
-          <a:fillRef idx="3">
-            <a:schemeClr val="accent1"/>
-          </a:fillRef>
-          <a:effectRef idx="2">
-            <a:schemeClr val="accent1"/>
-          </a:effectRef>
-          <a:fontRef idx="minor">
-            <a:schemeClr val="lt1"/>
-          </a:fontRef>
-        </p:style>
-        <p:txBody>
-          <a:bodyPr rtlCol="0" anchor="ctr"/>
-          <a:lstStyle/>
-          <a:p>
-            <a:pPr algn="ctr"/>
-          </a:p>
-        </p:txBody>
-      </p:sp>
-      <p:sp>
-        <p:nvSpPr>
-          <p:cNvPr id="3" name="Rectangle 2"/>
-          <p:cNvSpPr/>
-          <p:nvPr/>
-        </p:nvSpPr>
-        <p:spPr>
-          <a:xfrm>
-            <a:off x="0" y="0"/>
-            <a:ext cx="4300000" cy="6858000"/>
           </a:xfrm>
           <a:prstGeom prst="rect">
             <a:avLst/>
@@ -4437,7 +4371,1102 @@
       </p:sp>
       <p:sp>
         <p:nvSpPr>
-          <p:cNvPr id="4" name="Rectangle 3"/>
+          <p:cNvPr id="3" name="Rectangle 2"/>
+          <p:cNvSpPr/>
+          <p:nvPr/>
+        </p:nvSpPr>
+        <p:spPr>
+          <a:xfrm>
+            <a:off x="4300000" y="0"/>
+            <a:ext cx="15000" cy="6858000"/>
+          </a:xfrm>
+          <a:prstGeom prst="rect">
+            <a:avLst/>
+          </a:prstGeom>
+          <a:solidFill>
+            <a:srgbClr val="3AEDE5"/>
+          </a:solidFill>
+          <a:ln>
+            <a:noFill/>
+          </a:ln>
+          <a:effectLst/>
+        </p:spPr>
+        <p:style>
+          <a:lnRef idx="1">
+            <a:schemeClr val="accent1"/>
+          </a:lnRef>
+          <a:fillRef idx="3">
+            <a:schemeClr val="accent1"/>
+          </a:fillRef>
+          <a:effectRef idx="2">
+            <a:schemeClr val="accent1"/>
+          </a:effectRef>
+          <a:fontRef idx="minor">
+            <a:schemeClr val="lt1"/>
+          </a:fontRef>
+        </p:style>
+        <p:txBody>
+          <a:bodyPr rtlCol="0" anchor="ctr"/>
+          <a:lstStyle/>
+          <a:p>
+            <a:pPr algn="ctr"/>
+          </a:p>
+        </p:txBody>
+      </p:sp>
+      <p:pic>
+        <p:nvPicPr>
+          <p:cNvPr id="4" name="Picture 3" descr="inside_circle_logo.png"/>
+          <p:cNvPicPr>
+            <a:picLocks noChangeAspect="1"/>
+          </p:cNvPicPr>
+          <p:nvPr/>
+        </p:nvPicPr>
+        <p:blipFill>
+          <a:blip r:embed="rId2"/>
+          <a:stretch>
+            <a:fillRect/>
+          </a:stretch>
+        </p:blipFill>
+        <p:spPr>
+          <a:xfrm>
+            <a:off x="10660000" y="130000"/>
+            <a:ext cx="1302000" cy="420000"/>
+          </a:xfrm>
+          <a:prstGeom prst="rect">
+            <a:avLst/>
+          </a:prstGeom>
+        </p:spPr>
+      </p:pic>
+      <p:sp>
+        <p:nvSpPr>
+          <p:cNvPr id="5" name="TextBox 4"/>
+          <p:cNvSpPr txBox="1"/>
+          <p:nvPr/>
+        </p:nvSpPr>
+        <p:spPr>
+          <a:xfrm>
+            <a:off x="228600" y="260000"/>
+            <a:ext cx="3842800" cy="800000"/>
+          </a:xfrm>
+          <a:prstGeom prst="rect">
+            <a:avLst/>
+          </a:prstGeom>
+          <a:noFill/>
+        </p:spPr>
+        <p:txBody>
+          <a:bodyPr wrap="square" lIns="0" rIns="0" tIns="0" bIns="0">
+            <a:spAutoFit/>
+          </a:bodyPr>
+          <a:lstStyle/>
+          <a:p>
+            <a:pPr algn="l"/>
+            <a:r>
+              <a:rPr sz="4800" b="1" i="0">
+                <a:solidFill>
+                  <a:srgbClr val="3AEDE5"/>
+                </a:solidFill>
+                <a:latin typeface="Alegreya Sans"/>
+              </a:rPr>
+              <a:t>R.M.</a:t>
+            </a:r>
+          </a:p>
+        </p:txBody>
+      </p:sp>
+      <p:sp>
+        <p:nvSpPr>
+          <p:cNvPr id="6" name="TextBox 5"/>
+          <p:cNvSpPr txBox="1"/>
+          <p:nvPr/>
+        </p:nvSpPr>
+        <p:spPr>
+          <a:xfrm>
+            <a:off x="4528600" y="300000"/>
+            <a:ext cx="5963400" cy="800000"/>
+          </a:xfrm>
+          <a:prstGeom prst="rect">
+            <a:avLst/>
+          </a:prstGeom>
+          <a:noFill/>
+        </p:spPr>
+        <p:txBody>
+          <a:bodyPr wrap="square" lIns="0" rIns="0" tIns="0" bIns="0">
+            <a:spAutoFit/>
+          </a:bodyPr>
+          <a:lstStyle/>
+          <a:p>
+            <a:r>
+              <a:rPr sz="2400" b="1" i="0">
+                <a:solidFill>
+                  <a:srgbClr val="FFFFFF"/>
+                </a:solidFill>
+                <a:latin typeface="Alegreya Sans"/>
+              </a:rPr>
+              <a:t>Senior Consultant — Risk &amp; Regulatory</a:t>
+            </a:r>
+          </a:p>
+          <a:p>
+            <a:pPr>
+              <a:spcBef>
+                <a:spcPts val="200"/>
+              </a:spcBef>
+            </a:pPr>
+            <a:r>
+              <a:rPr sz="1500" b="0" i="1">
+                <a:solidFill>
+                  <a:srgbClr val="3AEDE5"/>
+                </a:solidFill>
+                <a:latin typeface="Alegreya Sans"/>
+              </a:rPr>
+              <a:t>Banking &amp; CIB — Regulatory Transformation</a:t>
+            </a:r>
+          </a:p>
+        </p:txBody>
+      </p:sp>
+      <p:sp>
+        <p:nvSpPr>
+          <p:cNvPr id="7" name="TextBox 6"/>
+          <p:cNvSpPr txBox="1"/>
+          <p:nvPr/>
+        </p:nvSpPr>
+        <p:spPr>
+          <a:xfrm>
+            <a:off x="228600" y="1180000"/>
+            <a:ext cx="3842800" cy="5318000"/>
+          </a:xfrm>
+          <a:prstGeom prst="rect">
+            <a:avLst/>
+          </a:prstGeom>
+          <a:noFill/>
+        </p:spPr>
+        <p:txBody>
+          <a:bodyPr wrap="square" lIns="0" rIns="0" tIns="0" bIns="0">
+            <a:spAutoFit/>
+          </a:bodyPr>
+          <a:lstStyle/>
+          <a:p>
+            <a:pPr algn="l">
+              <a:spcAft>
+                <a:spcPts val="300"/>
+              </a:spcAft>
+            </a:pPr>
+            <a:r>
+              <a:rPr sz="1300" b="1" i="0">
+                <a:solidFill>
+                  <a:srgbClr val="3AEDE5"/>
+                </a:solidFill>
+                <a:latin typeface="Alegreya Sans"/>
+              </a:rPr>
+              <a:t>MAIN AREAS OF EXPERTISE</a:t>
+            </a:r>
+          </a:p>
+          <a:p>
+            <a:pPr algn="l">
+              <a:spcAft>
+                <a:spcPts val="100"/>
+              </a:spcAft>
+            </a:pPr>
+            <a:r>
+              <a:rPr sz="1200" b="1" i="0">
+                <a:solidFill>
+                  <a:srgbClr val="3AEDE5"/>
+                </a:solidFill>
+                <a:latin typeface="Alegreya Sans"/>
+              </a:rPr>
+              <a:t>•  </a:t>
+            </a:r>
+            <a:r>
+              <a:rPr sz="1200" b="0" i="0">
+                <a:solidFill>
+                  <a:srgbClr val="FFFFFF"/>
+                </a:solidFill>
+                <a:latin typeface="Alegreya Sans"/>
+              </a:rPr>
+              <a:t>Risk &amp; Regulatory</a:t>
+            </a:r>
+          </a:p>
+          <a:p>
+            <a:pPr algn="l">
+              <a:spcAft>
+                <a:spcPts val="100"/>
+              </a:spcAft>
+            </a:pPr>
+            <a:r>
+              <a:rPr sz="1200" b="1" i="0">
+                <a:solidFill>
+                  <a:srgbClr val="3AEDE5"/>
+                </a:solidFill>
+                <a:latin typeface="Alegreya Sans"/>
+              </a:rPr>
+              <a:t>•  </a:t>
+            </a:r>
+            <a:r>
+              <a:rPr sz="1200" b="0" i="0">
+                <a:solidFill>
+                  <a:srgbClr val="FFFFFF"/>
+                </a:solidFill>
+                <a:latin typeface="Alegreya Sans"/>
+              </a:rPr>
+              <a:t>Banking Transformation (CIB / Retail)</a:t>
+            </a:r>
+          </a:p>
+          <a:p>
+            <a:pPr algn="l">
+              <a:spcAft>
+                <a:spcPts val="100"/>
+              </a:spcAft>
+            </a:pPr>
+            <a:r>
+              <a:rPr sz="1200" b="1" i="0">
+                <a:solidFill>
+                  <a:srgbClr val="3AEDE5"/>
+                </a:solidFill>
+                <a:latin typeface="Alegreya Sans"/>
+              </a:rPr>
+              <a:t>•  </a:t>
+            </a:r>
+            <a:r>
+              <a:rPr sz="1200" b="0" i="0">
+                <a:solidFill>
+                  <a:srgbClr val="FFFFFF"/>
+                </a:solidFill>
+                <a:latin typeface="Alegreya Sans"/>
+              </a:rPr>
+              <a:t>IRB Models &amp; Credit Risk</a:t>
+            </a:r>
+          </a:p>
+          <a:p>
+            <a:pPr algn="l">
+              <a:spcAft>
+                <a:spcPts val="100"/>
+              </a:spcAft>
+            </a:pPr>
+            <a:r>
+              <a:rPr sz="1200" b="1" i="0">
+                <a:solidFill>
+                  <a:srgbClr val="3AEDE5"/>
+                </a:solidFill>
+                <a:latin typeface="Alegreya Sans"/>
+              </a:rPr>
+              <a:t>•  </a:t>
+            </a:r>
+            <a:r>
+              <a:rPr sz="1200" b="0" i="0">
+                <a:solidFill>
+                  <a:srgbClr val="FFFFFF"/>
+                </a:solidFill>
+                <a:latin typeface="Alegreya Sans"/>
+              </a:rPr>
+              <a:t>CRR 3 — Recovery &amp; Resolution</a:t>
+            </a:r>
+          </a:p>
+          <a:p>
+            <a:pPr algn="l">
+              <a:spcAft>
+                <a:spcPts val="100"/>
+              </a:spcAft>
+            </a:pPr>
+            <a:r>
+              <a:rPr sz="1200" b="1" i="0">
+                <a:solidFill>
+                  <a:srgbClr val="3AEDE5"/>
+                </a:solidFill>
+                <a:latin typeface="Alegreya Sans"/>
+              </a:rPr>
+              <a:t>•  </a:t>
+            </a:r>
+            <a:r>
+              <a:rPr sz="1200" b="0" i="0">
+                <a:solidFill>
+                  <a:srgbClr val="FFFFFF"/>
+                </a:solidFill>
+                <a:latin typeface="Alegreya Sans"/>
+              </a:rPr>
+              <a:t>Digital Risk Governance (EU AI Act)</a:t>
+            </a:r>
+          </a:p>
+          <a:p>
+            <a:pPr algn="l">
+              <a:spcBef>
+                <a:spcPts val="600"/>
+              </a:spcBef>
+              <a:spcAft>
+                <a:spcPts val="300"/>
+              </a:spcAft>
+            </a:pPr>
+            <a:r>
+              <a:rPr sz="1300" b="1" i="0">
+                <a:solidFill>
+                  <a:srgbClr val="3AEDE5"/>
+                </a:solidFill>
+                <a:latin typeface="Alegreya Sans"/>
+              </a:rPr>
+              <a:t>LANGUAGES</a:t>
+            </a:r>
+          </a:p>
+          <a:p>
+            <a:pPr algn="l">
+              <a:spcAft>
+                <a:spcPts val="100"/>
+              </a:spcAft>
+            </a:pPr>
+            <a:r>
+              <a:rPr sz="1200" b="1" i="0">
+                <a:solidFill>
+                  <a:srgbClr val="3AEDE5"/>
+                </a:solidFill>
+                <a:latin typeface="Alegreya Sans"/>
+              </a:rPr>
+              <a:t>•  </a:t>
+            </a:r>
+            <a:r>
+              <a:rPr sz="1200" b="0" i="0">
+                <a:solidFill>
+                  <a:srgbClr val="FFFFFF"/>
+                </a:solidFill>
+                <a:latin typeface="Alegreya Sans"/>
+              </a:rPr>
+              <a:t>French — Native</a:t>
+            </a:r>
+          </a:p>
+          <a:p>
+            <a:pPr algn="l">
+              <a:spcAft>
+                <a:spcPts val="100"/>
+              </a:spcAft>
+            </a:pPr>
+            <a:r>
+              <a:rPr sz="1200" b="1" i="0">
+                <a:solidFill>
+                  <a:srgbClr val="3AEDE5"/>
+                </a:solidFill>
+                <a:latin typeface="Alegreya Sans"/>
+              </a:rPr>
+              <a:t>•  </a:t>
+            </a:r>
+            <a:r>
+              <a:rPr sz="1200" b="0" i="0">
+                <a:solidFill>
+                  <a:srgbClr val="FFFFFF"/>
+                </a:solidFill>
+                <a:latin typeface="Alegreya Sans"/>
+              </a:rPr>
+              <a:t>English — Fluent</a:t>
+            </a:r>
+          </a:p>
+          <a:p>
+            <a:pPr algn="l">
+              <a:spcAft>
+                <a:spcPts val="100"/>
+              </a:spcAft>
+            </a:pPr>
+            <a:r>
+              <a:rPr sz="1200" b="1" i="0">
+                <a:solidFill>
+                  <a:srgbClr val="3AEDE5"/>
+                </a:solidFill>
+                <a:latin typeface="Alegreya Sans"/>
+              </a:rPr>
+              <a:t>•  </a:t>
+            </a:r>
+            <a:r>
+              <a:rPr sz="1200" b="0" i="0">
+                <a:solidFill>
+                  <a:srgbClr val="FFFFFF"/>
+                </a:solidFill>
+                <a:latin typeface="Alegreya Sans"/>
+              </a:rPr>
+              <a:t>Spanish — Basic</a:t>
+            </a:r>
+          </a:p>
+          <a:p>
+            <a:pPr algn="l">
+              <a:spcBef>
+                <a:spcPts val="600"/>
+              </a:spcBef>
+              <a:spcAft>
+                <a:spcPts val="300"/>
+              </a:spcAft>
+            </a:pPr>
+            <a:r>
+              <a:rPr sz="1300" b="1" i="0">
+                <a:solidFill>
+                  <a:srgbClr val="3AEDE5"/>
+                </a:solidFill>
+                <a:latin typeface="Alegreya Sans"/>
+              </a:rPr>
+              <a:t>EDUCATION &amp; CERTIFICATIONS</a:t>
+            </a:r>
+          </a:p>
+          <a:p>
+            <a:pPr algn="l">
+              <a:spcAft>
+                <a:spcPts val="100"/>
+              </a:spcAft>
+            </a:pPr>
+            <a:r>
+              <a:rPr sz="1200" b="1" i="0">
+                <a:solidFill>
+                  <a:srgbClr val="3AEDE5"/>
+                </a:solidFill>
+                <a:latin typeface="Alegreya Sans"/>
+              </a:rPr>
+              <a:t>2016 — 2017  </a:t>
+            </a:r>
+            <a:r>
+              <a:rPr sz="1200" b="1" i="0">
+                <a:solidFill>
+                  <a:srgbClr val="FFFFFF"/>
+                </a:solidFill>
+                <a:latin typeface="Alegreya Sans"/>
+              </a:rPr>
+              <a:t>Paris 1 Panthéon-Sorbonne</a:t>
+            </a:r>
+          </a:p>
+          <a:p>
+            <a:pPr algn="l">
+              <a:spcAft>
+                <a:spcPts val="300"/>
+              </a:spcAft>
+            </a:pPr>
+            <a:r>
+              <a:rPr sz="1200" b="0" i="1">
+                <a:solidFill>
+                  <a:srgbClr val="CCD6E8"/>
+                </a:solidFill>
+                <a:latin typeface="Alegreya Sans"/>
+              </a:rPr>
+              <a:t>Master's in Banking &amp; Finance</a:t>
+            </a:r>
+          </a:p>
+          <a:p>
+            <a:pPr algn="l">
+              <a:spcAft>
+                <a:spcPts val="100"/>
+              </a:spcAft>
+            </a:pPr>
+            <a:r>
+              <a:rPr sz="1200" b="1" i="0">
+                <a:solidFill>
+                  <a:srgbClr val="3AEDE5"/>
+                </a:solidFill>
+                <a:latin typeface="Alegreya Sans"/>
+              </a:rPr>
+              <a:t>2013 — 2016  </a:t>
+            </a:r>
+            <a:r>
+              <a:rPr sz="1200" b="1" i="0">
+                <a:solidFill>
+                  <a:srgbClr val="FFFFFF"/>
+                </a:solidFill>
+                <a:latin typeface="Alegreya Sans"/>
+              </a:rPr>
+              <a:t>Bordeaux / Tampere</a:t>
+            </a:r>
+          </a:p>
+          <a:p>
+            <a:pPr algn="l">
+              <a:spcAft>
+                <a:spcPts val="300"/>
+              </a:spcAft>
+            </a:pPr>
+            <a:r>
+              <a:rPr sz="1200" b="0" i="1">
+                <a:solidFill>
+                  <a:srgbClr val="CCD6E8"/>
+                </a:solidFill>
+                <a:latin typeface="Alegreya Sans"/>
+              </a:rPr>
+              <a:t>Magistère in Economics &amp; International F…</a:t>
+            </a:r>
+          </a:p>
+          <a:p>
+            <a:pPr algn="l">
+              <a:spcAft>
+                <a:spcPts val="100"/>
+              </a:spcAft>
+            </a:pPr>
+            <a:r>
+              <a:rPr sz="1200" b="1" i="0">
+                <a:solidFill>
+                  <a:srgbClr val="3AEDE5"/>
+                </a:solidFill>
+                <a:latin typeface="Alegreya Sans"/>
+              </a:rPr>
+              <a:t>2012 — 2013  </a:t>
+            </a:r>
+            <a:r>
+              <a:rPr sz="1200" b="1" i="0">
+                <a:solidFill>
+                  <a:srgbClr val="FFFFFF"/>
+                </a:solidFill>
+                <a:latin typeface="Alegreya Sans"/>
+              </a:rPr>
+              <a:t>Lycée Michel Montaigne</a:t>
+            </a:r>
+          </a:p>
+          <a:p>
+            <a:pPr algn="l">
+              <a:spcAft>
+                <a:spcPts val="300"/>
+              </a:spcAft>
+            </a:pPr>
+            <a:r>
+              <a:rPr sz="1200" b="0" i="1">
+                <a:solidFill>
+                  <a:srgbClr val="CCD6E8"/>
+                </a:solidFill>
+                <a:latin typeface="Alegreya Sans"/>
+              </a:rPr>
+              <a:t>Prépa HEC, ECE track</a:t>
+            </a:r>
+          </a:p>
+          <a:p>
+            <a:pPr algn="l">
+              <a:spcBef>
+                <a:spcPts val="600"/>
+              </a:spcBef>
+              <a:spcAft>
+                <a:spcPts val="300"/>
+              </a:spcAft>
+            </a:pPr>
+            <a:r>
+              <a:rPr sz="1300" b="1" i="0">
+                <a:solidFill>
+                  <a:srgbClr val="3AEDE5"/>
+                </a:solidFill>
+                <a:latin typeface="Alegreya Sans"/>
+              </a:rPr>
+              <a:t>ENGAGEMENTS &amp; ACHIEVEMENTS</a:t>
+            </a:r>
+          </a:p>
+          <a:p>
+            <a:pPr algn="l">
+              <a:spcAft>
+                <a:spcPts val="200"/>
+              </a:spcAft>
+            </a:pPr>
+            <a:r>
+              <a:rPr sz="1200" b="1" i="0">
+                <a:solidFill>
+                  <a:srgbClr val="3AEDE5"/>
+                </a:solidFill>
+                <a:latin typeface="Alegreya Sans"/>
+              </a:rPr>
+              <a:t>• </a:t>
+            </a:r>
+            <a:r>
+              <a:rPr sz="1200" b="1" i="0">
+                <a:solidFill>
+                  <a:srgbClr val="FFFFFF"/>
+                </a:solidFill>
+                <a:latin typeface="Alegreya Sans"/>
+              </a:rPr>
+              <a:t>Author</a:t>
+            </a:r>
+            <a:r>
+              <a:rPr sz="1200" b="0" i="1">
+                <a:solidFill>
+                  <a:srgbClr val="CCD6E8"/>
+                </a:solidFill>
+                <a:latin typeface="Alegreya Sans"/>
+              </a:rPr>
+              <a:t> — EY France banking regulatory newsle…</a:t>
+            </a:r>
+          </a:p>
+          <a:p>
+            <a:pPr algn="l">
+              <a:spcAft>
+                <a:spcPts val="200"/>
+              </a:spcAft>
+            </a:pPr>
+            <a:r>
+              <a:rPr sz="1200" b="1" i="0">
+                <a:solidFill>
+                  <a:srgbClr val="3AEDE5"/>
+                </a:solidFill>
+                <a:latin typeface="Alegreya Sans"/>
+              </a:rPr>
+              <a:t>• </a:t>
+            </a:r>
+            <a:r>
+              <a:rPr sz="1200" b="1" i="0">
+                <a:solidFill>
+                  <a:srgbClr val="FFFFFF"/>
+                </a:solidFill>
+                <a:latin typeface="Alegreya Sans"/>
+              </a:rPr>
+              <a:t>G-SIB lead</a:t>
+            </a:r>
+            <a:r>
+              <a:rPr sz="1200" b="0" i="1">
+                <a:solidFill>
+                  <a:srgbClr val="CCD6E8"/>
+                </a:solidFill>
+                <a:latin typeface="Alegreya Sans"/>
+              </a:rPr>
+              <a:t> — Two priority Risk &amp; Regulatory acco…</a:t>
+            </a:r>
+          </a:p>
+          <a:p>
+            <a:pPr algn="l">
+              <a:spcAft>
+                <a:spcPts val="200"/>
+              </a:spcAft>
+            </a:pPr>
+            <a:r>
+              <a:rPr sz="1200" b="1" i="0">
+                <a:solidFill>
+                  <a:srgbClr val="3AEDE5"/>
+                </a:solidFill>
+                <a:latin typeface="Alegreya Sans"/>
+              </a:rPr>
+              <a:t>• </a:t>
+            </a:r>
+            <a:r>
+              <a:rPr sz="1200" b="1" i="0">
+                <a:solidFill>
+                  <a:srgbClr val="FFFFFF"/>
+                </a:solidFill>
+                <a:latin typeface="Alegreya Sans"/>
+              </a:rPr>
+              <a:t>Content creator</a:t>
+            </a:r>
+            <a:r>
+              <a:rPr sz="1200" b="0" i="1">
+                <a:solidFill>
+                  <a:srgbClr val="CCD6E8"/>
+                </a:solidFill>
+                <a:latin typeface="Alegreya Sans"/>
+              </a:rPr>
+              <a:t> — Financial podcast &amp; newsletter</a:t>
+            </a:r>
+          </a:p>
+        </p:txBody>
+      </p:sp>
+      <p:sp>
+        <p:nvSpPr>
+          <p:cNvPr id="8" name="TextBox 7"/>
+          <p:cNvSpPr txBox="1"/>
+          <p:nvPr/>
+        </p:nvSpPr>
+        <p:spPr>
+          <a:xfrm>
+            <a:off x="4528600" y="1180000"/>
+            <a:ext cx="7434800" cy="5318000"/>
+          </a:xfrm>
+          <a:prstGeom prst="rect">
+            <a:avLst/>
+          </a:prstGeom>
+          <a:noFill/>
+        </p:spPr>
+        <p:txBody>
+          <a:bodyPr wrap="square" lIns="0" rIns="0" tIns="0" bIns="0">
+            <a:spAutoFit/>
+          </a:bodyPr>
+          <a:lstStyle/>
+          <a:p>
+            <a:pPr algn="l">
+              <a:spcAft>
+                <a:spcPts val="300"/>
+              </a:spcAft>
+            </a:pPr>
+            <a:r>
+              <a:rPr sz="1300" b="1" i="0">
+                <a:solidFill>
+                  <a:srgbClr val="3AEDE5"/>
+                </a:solidFill>
+                <a:latin typeface="Alegreya Sans"/>
+              </a:rPr>
+              <a:t>PROFESSIONAL EXPERIENCE</a:t>
+            </a:r>
+          </a:p>
+          <a:p>
+            <a:pPr algn="l">
+              <a:spcAft>
+                <a:spcPts val="100"/>
+              </a:spcAft>
+            </a:pPr>
+            <a:r>
+              <a:rPr sz="1200" b="1" i="0">
+                <a:solidFill>
+                  <a:srgbClr val="3AEDE5"/>
+                </a:solidFill>
+                <a:latin typeface="Alegreya Sans"/>
+              </a:rPr>
+              <a:t>▸ </a:t>
+            </a:r>
+            <a:r>
+              <a:rPr sz="1200" b="1" i="0">
+                <a:solidFill>
+                  <a:srgbClr val="FFFFFF"/>
+                </a:solidFill>
+                <a:latin typeface="Alegreya Sans"/>
+              </a:rPr>
+              <a:t>Inside (Inside Circle, Inside Banking, Inside Training)</a:t>
+            </a:r>
+            <a:r>
+              <a:rPr sz="1200" b="0" i="0">
+                <a:solidFill>
+                  <a:srgbClr val="FFFFFF"/>
+                </a:solidFill>
+                <a:latin typeface="Alegreya Sans"/>
+              </a:rPr>
+              <a:t> — Founder — Independent Consultant</a:t>
+            </a:r>
+            <a:r>
+              <a:rPr sz="1200" b="0" i="1">
+                <a:solidFill>
+                  <a:srgbClr val="3AEDE5"/>
+                </a:solidFill>
+                <a:latin typeface="Alegreya Sans"/>
+              </a:rPr>
+              <a:t>  (Since Jan. 26)</a:t>
+            </a:r>
+          </a:p>
+          <a:p>
+            <a:pPr algn="l" lvl="1">
+              <a:spcAft>
+                <a:spcPts val="100"/>
+              </a:spcAft>
+            </a:pPr>
+            <a:r>
+              <a:rPr sz="1200" b="1" i="0">
+                <a:solidFill>
+                  <a:srgbClr val="3AEDE5"/>
+                </a:solidFill>
+                <a:latin typeface="Alegreya Sans"/>
+              </a:rPr>
+              <a:t>•  </a:t>
+            </a:r>
+            <a:r>
+              <a:rPr sz="1200" b="0" i="0">
+                <a:solidFill>
+                  <a:srgbClr val="FFFFFF"/>
+                </a:solidFill>
+                <a:latin typeface="Alegreya Sans"/>
+              </a:rPr>
+              <a:t>Financial-sector freelance community (banking, insurance, AM); independent media (2.5M views in 2025, podcast +50K listens, newsletter +13K…</a:t>
+            </a:r>
+          </a:p>
+          <a:p>
+            <a:pPr algn="l" lvl="1">
+              <a:spcAft>
+                <a:spcPts val="100"/>
+              </a:spcAft>
+            </a:pPr>
+            <a:r>
+              <a:rPr sz="1200" b="1" i="0">
+                <a:solidFill>
+                  <a:srgbClr val="3AEDE5"/>
+                </a:solidFill>
+                <a:latin typeface="Alegreya Sans"/>
+              </a:rPr>
+              <a:t>•  </a:t>
+            </a:r>
+            <a:r>
+              <a:rPr sz="1200" b="0" i="0">
+                <a:solidFill>
+                  <a:srgbClr val="FFFFFF"/>
+                </a:solidFill>
+                <a:latin typeface="Alegreya Sans"/>
+              </a:rPr>
+              <a:t>Inside Training: financial education and Personal Branding for senior executives and teams in the financial sector.</a:t>
+            </a:r>
+          </a:p>
+          <a:p>
+            <a:pPr algn="l">
+              <a:spcAft>
+                <a:spcPts val="100"/>
+              </a:spcAft>
+            </a:pPr>
+            <a:r>
+              <a:rPr sz="1200" b="1" i="0">
+                <a:solidFill>
+                  <a:srgbClr val="3AEDE5"/>
+                </a:solidFill>
+                <a:latin typeface="Alegreya Sans"/>
+              </a:rPr>
+              <a:t>▸ </a:t>
+            </a:r>
+            <a:r>
+              <a:rPr sz="1200" b="1" i="0">
+                <a:solidFill>
+                  <a:srgbClr val="FFFFFF"/>
+                </a:solidFill>
+                <a:latin typeface="Alegreya Sans"/>
+              </a:rPr>
+              <a:t>EY</a:t>
+            </a:r>
+            <a:r>
+              <a:rPr sz="1200" b="0" i="0">
+                <a:solidFill>
+                  <a:srgbClr val="FFFFFF"/>
+                </a:solidFill>
+                <a:latin typeface="Alegreya Sans"/>
+              </a:rPr>
+              <a:t> — Senior Consultant → Senior Manager</a:t>
+            </a:r>
+            <a:r>
+              <a:rPr sz="1200" b="0" i="1">
+                <a:solidFill>
+                  <a:srgbClr val="3AEDE5"/>
+                </a:solidFill>
+                <a:latin typeface="Alegreya Sans"/>
+              </a:rPr>
+              <a:t>  (Oct. 19 — Dec. 25)</a:t>
+            </a:r>
+          </a:p>
+          <a:p>
+            <a:pPr algn="l" lvl="1">
+              <a:spcAft>
+                <a:spcPts val="100"/>
+              </a:spcAft>
+            </a:pPr>
+            <a:r>
+              <a:rPr sz="1200" b="1" i="0">
+                <a:solidFill>
+                  <a:srgbClr val="3AEDE5"/>
+                </a:solidFill>
+                <a:latin typeface="Alegreya Sans"/>
+              </a:rPr>
+              <a:t>•  </a:t>
+            </a:r>
+            <a:r>
+              <a:rPr sz="1200" b="0" i="0">
+                <a:solidFill>
+                  <a:srgbClr val="FFFFFF"/>
+                </a:solidFill>
+                <a:latin typeface="Alegreya Sans"/>
+              </a:rPr>
+              <a:t>Redesign of the internal counterparty rating process (7 FTE); IRB credit-model rollout as part of a portfolio acquisition (TOM, supervisor e…</a:t>
+            </a:r>
+          </a:p>
+          <a:p>
+            <a:pPr algn="l" lvl="1">
+              <a:spcAft>
+                <a:spcPts val="100"/>
+              </a:spcAft>
+            </a:pPr>
+            <a:r>
+              <a:rPr sz="1200" b="1" i="0">
+                <a:solidFill>
+                  <a:srgbClr val="3AEDE5"/>
+                </a:solidFill>
+                <a:latin typeface="Alegreya Sans"/>
+              </a:rPr>
+              <a:t>•  </a:t>
+            </a:r>
+            <a:r>
+              <a:rPr sz="1200" b="0" i="0">
+                <a:solidFill>
+                  <a:srgbClr val="FFFFFF"/>
+                </a:solidFill>
+                <a:latin typeface="Alegreya Sans"/>
+              </a:rPr>
+              <a:t>Lead of digital-risk projects for a G-SIB: EU AI Act compliance, risk-management framework.</a:t>
+            </a:r>
+          </a:p>
+          <a:p>
+            <a:pPr algn="l">
+              <a:spcAft>
+                <a:spcPts val="100"/>
+              </a:spcAft>
+            </a:pPr>
+            <a:r>
+              <a:rPr sz="1200" b="1" i="0">
+                <a:solidFill>
+                  <a:srgbClr val="3AEDE5"/>
+                </a:solidFill>
+                <a:latin typeface="Alegreya Sans"/>
+              </a:rPr>
+              <a:t>▸ </a:t>
+            </a:r>
+            <a:r>
+              <a:rPr sz="1200" b="1" i="0">
+                <a:solidFill>
+                  <a:srgbClr val="FFFFFF"/>
+                </a:solidFill>
+                <a:latin typeface="Alegreya Sans"/>
+              </a:rPr>
+              <a:t>PwC</a:t>
+            </a:r>
+            <a:r>
+              <a:rPr sz="1200" b="0" i="0">
+                <a:solidFill>
+                  <a:srgbClr val="FFFFFF"/>
+                </a:solidFill>
+                <a:latin typeface="Alegreya Sans"/>
+              </a:rPr>
+              <a:t> — Consultant Financial Services</a:t>
+            </a:r>
+            <a:r>
+              <a:rPr sz="1200" b="0" i="1">
+                <a:solidFill>
+                  <a:srgbClr val="3AEDE5"/>
+                </a:solidFill>
+                <a:latin typeface="Alegreya Sans"/>
+              </a:rPr>
+              <a:t>  (Sept. 17 — Oct. 19)</a:t>
+            </a:r>
+          </a:p>
+          <a:p>
+            <a:pPr algn="l" lvl="1">
+              <a:spcAft>
+                <a:spcPts val="100"/>
+              </a:spcAft>
+            </a:pPr>
+            <a:r>
+              <a:rPr sz="1200" b="1" i="0">
+                <a:solidFill>
+                  <a:srgbClr val="3AEDE5"/>
+                </a:solidFill>
+                <a:latin typeface="Alegreya Sans"/>
+              </a:rPr>
+              <a:t>•  </a:t>
+            </a:r>
+            <a:r>
+              <a:rPr sz="1200" b="0" i="0">
+                <a:solidFill>
+                  <a:srgbClr val="FFFFFF"/>
+                </a:solidFill>
+                <a:latin typeface="Alegreya Sans"/>
+              </a:rPr>
+              <a:t>Coordination of a US-regulator certification for a French G-SIB (10 entities).</a:t>
+            </a:r>
+          </a:p>
+          <a:p>
+            <a:pPr algn="l" lvl="1">
+              <a:spcAft>
+                <a:spcPts val="100"/>
+              </a:spcAft>
+            </a:pPr>
+            <a:r>
+              <a:rPr sz="1200" b="1" i="0">
+                <a:solidFill>
+                  <a:srgbClr val="3AEDE5"/>
+                </a:solidFill>
+                <a:latin typeface="Alegreya Sans"/>
+              </a:rPr>
+              <a:t>•  </a:t>
+            </a:r>
+            <a:r>
+              <a:rPr sz="1200" b="0" i="0">
+                <a:solidFill>
+                  <a:srgbClr val="FFFFFF"/>
+                </a:solidFill>
+                <a:latin typeface="Alegreya Sans"/>
+              </a:rPr>
+              <a:t>Design of regulatory training rolled out to 8,000+ employees.</a:t>
+            </a:r>
+          </a:p>
+          <a:p>
+            <a:pPr algn="l">
+              <a:spcAft>
+                <a:spcPts val="100"/>
+              </a:spcAft>
+            </a:pPr>
+            <a:r>
+              <a:rPr sz="1200" b="1" i="0">
+                <a:solidFill>
+                  <a:srgbClr val="3AEDE5"/>
+                </a:solidFill>
+                <a:latin typeface="Alegreya Sans"/>
+              </a:rPr>
+              <a:t>▸ </a:t>
+            </a:r>
+            <a:r>
+              <a:rPr sz="1200" b="1" i="0">
+                <a:solidFill>
+                  <a:srgbClr val="FFFFFF"/>
+                </a:solidFill>
+                <a:latin typeface="Alegreya Sans"/>
+              </a:rPr>
+              <a:t>Mazars</a:t>
+            </a:r>
+            <a:r>
+              <a:rPr sz="1200" b="0" i="0">
+                <a:solidFill>
+                  <a:srgbClr val="FFFFFF"/>
+                </a:solidFill>
+                <a:latin typeface="Alegreya Sans"/>
+              </a:rPr>
+              <a:t> — Consultant Financial Services</a:t>
+            </a:r>
+            <a:r>
+              <a:rPr sz="1200" b="0" i="1">
+                <a:solidFill>
+                  <a:srgbClr val="3AEDE5"/>
+                </a:solidFill>
+                <a:latin typeface="Alegreya Sans"/>
+              </a:rPr>
+              <a:t>  (April — Sept. 17)</a:t>
+            </a:r>
+          </a:p>
+          <a:p>
+            <a:pPr algn="l" lvl="1">
+              <a:spcAft>
+                <a:spcPts val="100"/>
+              </a:spcAft>
+            </a:pPr>
+            <a:r>
+              <a:rPr sz="1200" b="1" i="0">
+                <a:solidFill>
+                  <a:srgbClr val="3AEDE5"/>
+                </a:solidFill>
+                <a:latin typeface="Alegreya Sans"/>
+              </a:rPr>
+              <a:t>•  </a:t>
+            </a:r>
+            <a:r>
+              <a:rPr sz="1200" b="0" i="0">
+                <a:solidFill>
+                  <a:srgbClr val="FFFFFF"/>
+                </a:solidFill>
+                <a:latin typeface="Alegreya Sans"/>
+              </a:rPr>
+              <a:t>Drafting of a Preventive Recovery Plan (PPR) for a foreign banking group: strategic analysis, recovery options, stress tests, governance.</a:t>
+            </a:r>
+          </a:p>
+          <a:p>
+            <a:pPr algn="l">
+              <a:spcBef>
+                <a:spcPts val="600"/>
+              </a:spcBef>
+              <a:spcAft>
+                <a:spcPts val="300"/>
+              </a:spcAft>
+            </a:pPr>
+            <a:r>
+              <a:rPr sz="1300" b="1" i="0">
+                <a:solidFill>
+                  <a:srgbClr val="3AEDE5"/>
+                </a:solidFill>
+                <a:latin typeface="Alegreya Sans"/>
+              </a:rPr>
+              <a:t>MAIN REFERENCES</a:t>
+            </a:r>
+          </a:p>
+          <a:p>
+            <a:pPr algn="l">
+              <a:spcAft>
+                <a:spcPts val="200"/>
+              </a:spcAft>
+            </a:pPr>
+            <a:r>
+              <a:rPr sz="1200" b="0" i="1">
+                <a:solidFill>
+                  <a:srgbClr val="FFFFFF"/>
+                </a:solidFill>
+                <a:latin typeface="Alegreya Sans"/>
+              </a:rPr>
+              <a:t>French G-SIB, Banque Populaire (BPACA), EY, PwC, Mazars</a:t>
+            </a:r>
+          </a:p>
+        </p:txBody>
+      </p:sp>
+      <p:sp>
+        <p:nvSpPr>
+          <p:cNvPr id="9" name="Rectangle 8"/>
           <p:cNvSpPr/>
           <p:nvPr/>
         </p:nvSpPr>
@@ -4476,1057 +5505,6 @@
           <a:lstStyle/>
           <a:p>
             <a:pPr algn="ctr"/>
-          </a:p>
-        </p:txBody>
-      </p:sp>
-      <p:pic>
-        <p:nvPicPr>
-          <p:cNvPr id="5" name="Picture 4" descr="inside_circle_logo.png"/>
-          <p:cNvPicPr>
-            <a:picLocks noChangeAspect="1"/>
-          </p:cNvPicPr>
-          <p:nvPr/>
-        </p:nvPicPr>
-        <p:blipFill>
-          <a:blip r:embed="rId2"/>
-          <a:stretch>
-            <a:fillRect/>
-          </a:stretch>
-        </p:blipFill>
-        <p:spPr>
-          <a:xfrm>
-            <a:off x="10660000" y="130000"/>
-            <a:ext cx="1302000" cy="420000"/>
-          </a:xfrm>
-          <a:prstGeom prst="rect">
-            <a:avLst/>
-          </a:prstGeom>
-        </p:spPr>
-      </p:pic>
-      <p:sp>
-        <p:nvSpPr>
-          <p:cNvPr id="6" name="TextBox 5"/>
-          <p:cNvSpPr txBox="1"/>
-          <p:nvPr/>
-        </p:nvSpPr>
-        <p:spPr>
-          <a:xfrm>
-            <a:off x="228600" y="260000"/>
-            <a:ext cx="3842800" cy="800000"/>
-          </a:xfrm>
-          <a:prstGeom prst="rect">
-            <a:avLst/>
-          </a:prstGeom>
-          <a:noFill/>
-        </p:spPr>
-        <p:txBody>
-          <a:bodyPr wrap="square" lIns="0" rIns="0" tIns="0" bIns="0">
-            <a:spAutoFit/>
-          </a:bodyPr>
-          <a:lstStyle/>
-          <a:p>
-            <a:pPr algn="l"/>
-            <a:r>
-              <a:rPr sz="4800" b="1" i="0">
-                <a:solidFill>
-                  <a:srgbClr val="3AEDE5"/>
-                </a:solidFill>
-                <a:latin typeface="Alegreya Sans"/>
-              </a:rPr>
-              <a:t>R.M.</a:t>
-            </a:r>
-          </a:p>
-        </p:txBody>
-      </p:sp>
-      <p:sp>
-        <p:nvSpPr>
-          <p:cNvPr id="7" name="TextBox 6"/>
-          <p:cNvSpPr txBox="1"/>
-          <p:nvPr/>
-        </p:nvSpPr>
-        <p:spPr>
-          <a:xfrm>
-            <a:off x="4528600" y="300000"/>
-            <a:ext cx="5963400" cy="800000"/>
-          </a:xfrm>
-          <a:prstGeom prst="rect">
-            <a:avLst/>
-          </a:prstGeom>
-          <a:noFill/>
-        </p:spPr>
-        <p:txBody>
-          <a:bodyPr wrap="square" lIns="0" rIns="0" tIns="0" bIns="0">
-            <a:spAutoFit/>
-          </a:bodyPr>
-          <a:lstStyle/>
-          <a:p>
-            <a:r>
-              <a:rPr sz="2400" b="1" i="0">
-                <a:solidFill>
-                  <a:srgbClr val="FFFFFF"/>
-                </a:solidFill>
-                <a:latin typeface="Alegreya Sans"/>
-              </a:rPr>
-              <a:t>Senior Consultant — Risk &amp; Regulatory</a:t>
-            </a:r>
-          </a:p>
-          <a:p>
-            <a:pPr>
-              <a:spcBef>
-                <a:spcPts val="200"/>
-              </a:spcBef>
-            </a:pPr>
-            <a:r>
-              <a:rPr sz="1500" b="0" i="1">
-                <a:solidFill>
-                  <a:srgbClr val="3AEDE5"/>
-                </a:solidFill>
-                <a:latin typeface="Alegreya Sans"/>
-              </a:rPr>
-              <a:t>Banking &amp; CIB — Regulatory Transformation</a:t>
-            </a:r>
-          </a:p>
-        </p:txBody>
-      </p:sp>
-      <p:sp>
-        <p:nvSpPr>
-          <p:cNvPr id="8" name="TextBox 7"/>
-          <p:cNvSpPr txBox="1"/>
-          <p:nvPr/>
-        </p:nvSpPr>
-        <p:spPr>
-          <a:xfrm>
-            <a:off x="228600" y="1180000"/>
-            <a:ext cx="3842800" cy="5318000"/>
-          </a:xfrm>
-          <a:prstGeom prst="rect">
-            <a:avLst/>
-          </a:prstGeom>
-          <a:noFill/>
-        </p:spPr>
-        <p:txBody>
-          <a:bodyPr wrap="square" lIns="0" rIns="0" tIns="0" bIns="0">
-            <a:spAutoFit/>
-          </a:bodyPr>
-          <a:lstStyle/>
-          <a:p>
-            <a:pPr algn="l">
-              <a:spcAft>
-                <a:spcPts val="300"/>
-              </a:spcAft>
-            </a:pPr>
-            <a:r>
-              <a:rPr sz="1300" b="1" i="0">
-                <a:solidFill>
-                  <a:srgbClr val="3AEDE5"/>
-                </a:solidFill>
-                <a:latin typeface="Alegreya Sans"/>
-              </a:rPr>
-              <a:t>MAIN AREAS OF EXPERTISE</a:t>
-            </a:r>
-          </a:p>
-          <a:p>
-            <a:pPr algn="l">
-              <a:spcAft>
-                <a:spcPts val="100"/>
-              </a:spcAft>
-            </a:pPr>
-            <a:r>
-              <a:rPr sz="1200" b="1" i="0">
-                <a:solidFill>
-                  <a:srgbClr val="3AEDE5"/>
-                </a:solidFill>
-                <a:latin typeface="Alegreya Sans"/>
-              </a:rPr>
-              <a:t>•  </a:t>
-            </a:r>
-            <a:r>
-              <a:rPr sz="1200" b="0" i="0">
-                <a:solidFill>
-                  <a:srgbClr val="FFFFFF"/>
-                </a:solidFill>
-                <a:latin typeface="Alegreya Sans"/>
-              </a:rPr>
-              <a:t>Risk &amp; Regulatory</a:t>
-            </a:r>
-          </a:p>
-          <a:p>
-            <a:pPr algn="l">
-              <a:spcAft>
-                <a:spcPts val="100"/>
-              </a:spcAft>
-            </a:pPr>
-            <a:r>
-              <a:rPr sz="1200" b="1" i="0">
-                <a:solidFill>
-                  <a:srgbClr val="3AEDE5"/>
-                </a:solidFill>
-                <a:latin typeface="Alegreya Sans"/>
-              </a:rPr>
-              <a:t>•  </a:t>
-            </a:r>
-            <a:r>
-              <a:rPr sz="1200" b="0" i="0">
-                <a:solidFill>
-                  <a:srgbClr val="FFFFFF"/>
-                </a:solidFill>
-                <a:latin typeface="Alegreya Sans"/>
-              </a:rPr>
-              <a:t>Banking Transformation (CIB / Retail)</a:t>
-            </a:r>
-          </a:p>
-          <a:p>
-            <a:pPr algn="l">
-              <a:spcAft>
-                <a:spcPts val="100"/>
-              </a:spcAft>
-            </a:pPr>
-            <a:r>
-              <a:rPr sz="1200" b="1" i="0">
-                <a:solidFill>
-                  <a:srgbClr val="3AEDE5"/>
-                </a:solidFill>
-                <a:latin typeface="Alegreya Sans"/>
-              </a:rPr>
-              <a:t>•  </a:t>
-            </a:r>
-            <a:r>
-              <a:rPr sz="1200" b="0" i="0">
-                <a:solidFill>
-                  <a:srgbClr val="FFFFFF"/>
-                </a:solidFill>
-                <a:latin typeface="Alegreya Sans"/>
-              </a:rPr>
-              <a:t>IRB Models &amp; Credit Risk</a:t>
-            </a:r>
-          </a:p>
-          <a:p>
-            <a:pPr algn="l">
-              <a:spcAft>
-                <a:spcPts val="100"/>
-              </a:spcAft>
-            </a:pPr>
-            <a:r>
-              <a:rPr sz="1200" b="1" i="0">
-                <a:solidFill>
-                  <a:srgbClr val="3AEDE5"/>
-                </a:solidFill>
-                <a:latin typeface="Alegreya Sans"/>
-              </a:rPr>
-              <a:t>•  </a:t>
-            </a:r>
-            <a:r>
-              <a:rPr sz="1200" b="0" i="0">
-                <a:solidFill>
-                  <a:srgbClr val="FFFFFF"/>
-                </a:solidFill>
-                <a:latin typeface="Alegreya Sans"/>
-              </a:rPr>
-              <a:t>CRR 3 — Recovery &amp; Resolution</a:t>
-            </a:r>
-          </a:p>
-          <a:p>
-            <a:pPr algn="l">
-              <a:spcAft>
-                <a:spcPts val="100"/>
-              </a:spcAft>
-            </a:pPr>
-            <a:r>
-              <a:rPr sz="1200" b="1" i="0">
-                <a:solidFill>
-                  <a:srgbClr val="3AEDE5"/>
-                </a:solidFill>
-                <a:latin typeface="Alegreya Sans"/>
-              </a:rPr>
-              <a:t>•  </a:t>
-            </a:r>
-            <a:r>
-              <a:rPr sz="1200" b="0" i="0">
-                <a:solidFill>
-                  <a:srgbClr val="FFFFFF"/>
-                </a:solidFill>
-                <a:latin typeface="Alegreya Sans"/>
-              </a:rPr>
-              <a:t>Digital Risk Governance (EU AI Act)</a:t>
-            </a:r>
-          </a:p>
-          <a:p>
-            <a:pPr algn="l">
-              <a:spcBef>
-                <a:spcPts val="600"/>
-              </a:spcBef>
-              <a:spcAft>
-                <a:spcPts val="300"/>
-              </a:spcAft>
-            </a:pPr>
-            <a:r>
-              <a:rPr sz="1300" b="1" i="0">
-                <a:solidFill>
-                  <a:srgbClr val="3AEDE5"/>
-                </a:solidFill>
-                <a:latin typeface="Alegreya Sans"/>
-              </a:rPr>
-              <a:t>LANGUAGES</a:t>
-            </a:r>
-          </a:p>
-          <a:p>
-            <a:pPr algn="l">
-              <a:spcAft>
-                <a:spcPts val="100"/>
-              </a:spcAft>
-            </a:pPr>
-            <a:r>
-              <a:rPr sz="1200" b="1" i="0">
-                <a:solidFill>
-                  <a:srgbClr val="3AEDE5"/>
-                </a:solidFill>
-                <a:latin typeface="Alegreya Sans"/>
-              </a:rPr>
-              <a:t>•  </a:t>
-            </a:r>
-            <a:r>
-              <a:rPr sz="1200" b="0" i="0">
-                <a:solidFill>
-                  <a:srgbClr val="FFFFFF"/>
-                </a:solidFill>
-                <a:latin typeface="Alegreya Sans"/>
-              </a:rPr>
-              <a:t>French — Native</a:t>
-            </a:r>
-          </a:p>
-          <a:p>
-            <a:pPr algn="l">
-              <a:spcAft>
-                <a:spcPts val="100"/>
-              </a:spcAft>
-            </a:pPr>
-            <a:r>
-              <a:rPr sz="1200" b="1" i="0">
-                <a:solidFill>
-                  <a:srgbClr val="3AEDE5"/>
-                </a:solidFill>
-                <a:latin typeface="Alegreya Sans"/>
-              </a:rPr>
-              <a:t>•  </a:t>
-            </a:r>
-            <a:r>
-              <a:rPr sz="1200" b="0" i="0">
-                <a:solidFill>
-                  <a:srgbClr val="FFFFFF"/>
-                </a:solidFill>
-                <a:latin typeface="Alegreya Sans"/>
-              </a:rPr>
-              <a:t>English — Fluent</a:t>
-            </a:r>
-          </a:p>
-          <a:p>
-            <a:pPr algn="l">
-              <a:spcAft>
-                <a:spcPts val="100"/>
-              </a:spcAft>
-            </a:pPr>
-            <a:r>
-              <a:rPr sz="1200" b="1" i="0">
-                <a:solidFill>
-                  <a:srgbClr val="3AEDE5"/>
-                </a:solidFill>
-                <a:latin typeface="Alegreya Sans"/>
-              </a:rPr>
-              <a:t>•  </a:t>
-            </a:r>
-            <a:r>
-              <a:rPr sz="1200" b="0" i="0">
-                <a:solidFill>
-                  <a:srgbClr val="FFFFFF"/>
-                </a:solidFill>
-                <a:latin typeface="Alegreya Sans"/>
-              </a:rPr>
-              <a:t>Spanish — Basic</a:t>
-            </a:r>
-          </a:p>
-          <a:p>
-            <a:pPr algn="l">
-              <a:spcBef>
-                <a:spcPts val="600"/>
-              </a:spcBef>
-              <a:spcAft>
-                <a:spcPts val="300"/>
-              </a:spcAft>
-            </a:pPr>
-            <a:r>
-              <a:rPr sz="1300" b="1" i="0">
-                <a:solidFill>
-                  <a:srgbClr val="3AEDE5"/>
-                </a:solidFill>
-                <a:latin typeface="Alegreya Sans"/>
-              </a:rPr>
-              <a:t>EDUCATION &amp; CERTIFICATIONS</a:t>
-            </a:r>
-          </a:p>
-          <a:p>
-            <a:pPr algn="l">
-              <a:spcAft>
-                <a:spcPts val="100"/>
-              </a:spcAft>
-            </a:pPr>
-            <a:r>
-              <a:rPr sz="1200" b="1" i="0">
-                <a:solidFill>
-                  <a:srgbClr val="3AEDE5"/>
-                </a:solidFill>
-                <a:latin typeface="Alegreya Sans"/>
-              </a:rPr>
-              <a:t>2016 — 2017  </a:t>
-            </a:r>
-            <a:r>
-              <a:rPr sz="1200" b="1" i="0">
-                <a:solidFill>
-                  <a:srgbClr val="FFFFFF"/>
-                </a:solidFill>
-                <a:latin typeface="Alegreya Sans"/>
-              </a:rPr>
-              <a:t>Paris 1 Panthéon-Sorbonne</a:t>
-            </a:r>
-          </a:p>
-          <a:p>
-            <a:pPr algn="l">
-              <a:spcAft>
-                <a:spcPts val="300"/>
-              </a:spcAft>
-            </a:pPr>
-            <a:r>
-              <a:rPr sz="1200" b="0" i="1">
-                <a:solidFill>
-                  <a:srgbClr val="CCD6E8"/>
-                </a:solidFill>
-                <a:latin typeface="Alegreya Sans"/>
-              </a:rPr>
-              <a:t>Master's in Banking &amp; Finance</a:t>
-            </a:r>
-          </a:p>
-          <a:p>
-            <a:pPr algn="l">
-              <a:spcAft>
-                <a:spcPts val="100"/>
-              </a:spcAft>
-            </a:pPr>
-            <a:r>
-              <a:rPr sz="1200" b="1" i="0">
-                <a:solidFill>
-                  <a:srgbClr val="3AEDE5"/>
-                </a:solidFill>
-                <a:latin typeface="Alegreya Sans"/>
-              </a:rPr>
-              <a:t>2013 — 2016  </a:t>
-            </a:r>
-            <a:r>
-              <a:rPr sz="1200" b="1" i="0">
-                <a:solidFill>
-                  <a:srgbClr val="FFFFFF"/>
-                </a:solidFill>
-                <a:latin typeface="Alegreya Sans"/>
-              </a:rPr>
-              <a:t>Bordeaux / Tampere</a:t>
-            </a:r>
-          </a:p>
-          <a:p>
-            <a:pPr algn="l">
-              <a:spcAft>
-                <a:spcPts val="300"/>
-              </a:spcAft>
-            </a:pPr>
-            <a:r>
-              <a:rPr sz="1200" b="0" i="1">
-                <a:solidFill>
-                  <a:srgbClr val="CCD6E8"/>
-                </a:solidFill>
-                <a:latin typeface="Alegreya Sans"/>
-              </a:rPr>
-              <a:t>Magistère in Economics &amp; International F…</a:t>
-            </a:r>
-          </a:p>
-          <a:p>
-            <a:pPr algn="l">
-              <a:spcAft>
-                <a:spcPts val="100"/>
-              </a:spcAft>
-            </a:pPr>
-            <a:r>
-              <a:rPr sz="1200" b="1" i="0">
-                <a:solidFill>
-                  <a:srgbClr val="3AEDE5"/>
-                </a:solidFill>
-                <a:latin typeface="Alegreya Sans"/>
-              </a:rPr>
-              <a:t>2012 — 2013  </a:t>
-            </a:r>
-            <a:r>
-              <a:rPr sz="1200" b="1" i="0">
-                <a:solidFill>
-                  <a:srgbClr val="FFFFFF"/>
-                </a:solidFill>
-                <a:latin typeface="Alegreya Sans"/>
-              </a:rPr>
-              <a:t>Lycée Michel Montaigne</a:t>
-            </a:r>
-          </a:p>
-          <a:p>
-            <a:pPr algn="l">
-              <a:spcAft>
-                <a:spcPts val="300"/>
-              </a:spcAft>
-            </a:pPr>
-            <a:r>
-              <a:rPr sz="1200" b="0" i="1">
-                <a:solidFill>
-                  <a:srgbClr val="CCD6E8"/>
-                </a:solidFill>
-                <a:latin typeface="Alegreya Sans"/>
-              </a:rPr>
-              <a:t>Prépa HEC, ECE track</a:t>
-            </a:r>
-          </a:p>
-          <a:p>
-            <a:pPr algn="l">
-              <a:spcBef>
-                <a:spcPts val="600"/>
-              </a:spcBef>
-              <a:spcAft>
-                <a:spcPts val="300"/>
-              </a:spcAft>
-            </a:pPr>
-            <a:r>
-              <a:rPr sz="1300" b="1" i="0">
-                <a:solidFill>
-                  <a:srgbClr val="3AEDE5"/>
-                </a:solidFill>
-                <a:latin typeface="Alegreya Sans"/>
-              </a:rPr>
-              <a:t>ENGAGEMENTS &amp; ACHIEVEMENTS</a:t>
-            </a:r>
-          </a:p>
-          <a:p>
-            <a:pPr algn="l">
-              <a:spcAft>
-                <a:spcPts val="200"/>
-              </a:spcAft>
-            </a:pPr>
-            <a:r>
-              <a:rPr sz="1200" b="1" i="0">
-                <a:solidFill>
-                  <a:srgbClr val="3AEDE5"/>
-                </a:solidFill>
-                <a:latin typeface="Alegreya Sans"/>
-              </a:rPr>
-              <a:t>• </a:t>
-            </a:r>
-            <a:r>
-              <a:rPr sz="1200" b="1" i="0">
-                <a:solidFill>
-                  <a:srgbClr val="FFFFFF"/>
-                </a:solidFill>
-                <a:latin typeface="Alegreya Sans"/>
-              </a:rPr>
-              <a:t>Author</a:t>
-            </a:r>
-            <a:r>
-              <a:rPr sz="1200" b="0" i="1">
-                <a:solidFill>
-                  <a:srgbClr val="CCD6E8"/>
-                </a:solidFill>
-                <a:latin typeface="Alegreya Sans"/>
-              </a:rPr>
-              <a:t> — EY France banking regulatory newsle…</a:t>
-            </a:r>
-          </a:p>
-          <a:p>
-            <a:pPr algn="l">
-              <a:spcAft>
-                <a:spcPts val="200"/>
-              </a:spcAft>
-            </a:pPr>
-            <a:r>
-              <a:rPr sz="1200" b="1" i="0">
-                <a:solidFill>
-                  <a:srgbClr val="3AEDE5"/>
-                </a:solidFill>
-                <a:latin typeface="Alegreya Sans"/>
-              </a:rPr>
-              <a:t>• </a:t>
-            </a:r>
-            <a:r>
-              <a:rPr sz="1200" b="1" i="0">
-                <a:solidFill>
-                  <a:srgbClr val="FFFFFF"/>
-                </a:solidFill>
-                <a:latin typeface="Alegreya Sans"/>
-              </a:rPr>
-              <a:t>G-SIB lead</a:t>
-            </a:r>
-            <a:r>
-              <a:rPr sz="1200" b="0" i="1">
-                <a:solidFill>
-                  <a:srgbClr val="CCD6E8"/>
-                </a:solidFill>
-                <a:latin typeface="Alegreya Sans"/>
-              </a:rPr>
-              <a:t> — Two priority Risk &amp; Regulatory acco…</a:t>
-            </a:r>
-          </a:p>
-          <a:p>
-            <a:pPr algn="l">
-              <a:spcAft>
-                <a:spcPts val="200"/>
-              </a:spcAft>
-            </a:pPr>
-            <a:r>
-              <a:rPr sz="1200" b="1" i="0">
-                <a:solidFill>
-                  <a:srgbClr val="3AEDE5"/>
-                </a:solidFill>
-                <a:latin typeface="Alegreya Sans"/>
-              </a:rPr>
-              <a:t>• </a:t>
-            </a:r>
-            <a:r>
-              <a:rPr sz="1200" b="1" i="0">
-                <a:solidFill>
-                  <a:srgbClr val="FFFFFF"/>
-                </a:solidFill>
-                <a:latin typeface="Alegreya Sans"/>
-              </a:rPr>
-              <a:t>Content creator</a:t>
-            </a:r>
-            <a:r>
-              <a:rPr sz="1200" b="0" i="1">
-                <a:solidFill>
-                  <a:srgbClr val="CCD6E8"/>
-                </a:solidFill>
-                <a:latin typeface="Alegreya Sans"/>
-              </a:rPr>
-              <a:t> — Financial podcast &amp; newsletter</a:t>
-            </a:r>
-          </a:p>
-        </p:txBody>
-      </p:sp>
-      <p:sp>
-        <p:nvSpPr>
-          <p:cNvPr id="9" name="TextBox 8"/>
-          <p:cNvSpPr txBox="1"/>
-          <p:nvPr/>
-        </p:nvSpPr>
-        <p:spPr>
-          <a:xfrm>
-            <a:off x="4528600" y="1180000"/>
-            <a:ext cx="7434800" cy="5318000"/>
-          </a:xfrm>
-          <a:prstGeom prst="rect">
-            <a:avLst/>
-          </a:prstGeom>
-          <a:noFill/>
-        </p:spPr>
-        <p:txBody>
-          <a:bodyPr wrap="square" lIns="0" rIns="0" tIns="0" bIns="0">
-            <a:spAutoFit/>
-          </a:bodyPr>
-          <a:lstStyle/>
-          <a:p>
-            <a:pPr algn="l">
-              <a:spcAft>
-                <a:spcPts val="300"/>
-              </a:spcAft>
-            </a:pPr>
-            <a:r>
-              <a:rPr sz="1300" b="1" i="0">
-                <a:solidFill>
-                  <a:srgbClr val="3AEDE5"/>
-                </a:solidFill>
-                <a:latin typeface="Alegreya Sans"/>
-              </a:rPr>
-              <a:t>PROFESSIONAL EXPERIENCE</a:t>
-            </a:r>
-          </a:p>
-          <a:p>
-            <a:pPr algn="l">
-              <a:spcAft>
-                <a:spcPts val="100"/>
-              </a:spcAft>
-            </a:pPr>
-            <a:r>
-              <a:rPr sz="1200" b="1" i="0">
-                <a:solidFill>
-                  <a:srgbClr val="3AEDE5"/>
-                </a:solidFill>
-                <a:latin typeface="Alegreya Sans"/>
-              </a:rPr>
-              <a:t>▸ </a:t>
-            </a:r>
-            <a:r>
-              <a:rPr sz="1200" b="1" i="0">
-                <a:solidFill>
-                  <a:srgbClr val="FFFFFF"/>
-                </a:solidFill>
-                <a:latin typeface="Alegreya Sans"/>
-              </a:rPr>
-              <a:t>Inside (Inside Circle, Inside Banking, Inside Training)</a:t>
-            </a:r>
-            <a:r>
-              <a:rPr sz="1200" b="0" i="0">
-                <a:solidFill>
-                  <a:srgbClr val="FFFFFF"/>
-                </a:solidFill>
-                <a:latin typeface="Alegreya Sans"/>
-              </a:rPr>
-              <a:t> — Founder — Independent Consultant</a:t>
-            </a:r>
-            <a:r>
-              <a:rPr sz="1200" b="0" i="1">
-                <a:solidFill>
-                  <a:srgbClr val="3AEDE5"/>
-                </a:solidFill>
-                <a:latin typeface="Alegreya Sans"/>
-              </a:rPr>
-              <a:t>  (Since Jan. 26)</a:t>
-            </a:r>
-          </a:p>
-          <a:p>
-            <a:pPr algn="l" lvl="1">
-              <a:spcAft>
-                <a:spcPts val="100"/>
-              </a:spcAft>
-            </a:pPr>
-            <a:r>
-              <a:rPr sz="1200" b="1" i="0">
-                <a:solidFill>
-                  <a:srgbClr val="3AEDE5"/>
-                </a:solidFill>
-                <a:latin typeface="Alegreya Sans"/>
-              </a:rPr>
-              <a:t>•  </a:t>
-            </a:r>
-            <a:r>
-              <a:rPr sz="1200" b="0" i="0">
-                <a:solidFill>
-                  <a:srgbClr val="FFFFFF"/>
-                </a:solidFill>
-                <a:latin typeface="Alegreya Sans"/>
-              </a:rPr>
-              <a:t>Financial-sector freelance community (banking, insurance, AM); independent media (2.5M views in 2025, podcast +50K listens, newsletter +13K…</a:t>
-            </a:r>
-          </a:p>
-          <a:p>
-            <a:pPr algn="l" lvl="1">
-              <a:spcAft>
-                <a:spcPts val="100"/>
-              </a:spcAft>
-            </a:pPr>
-            <a:r>
-              <a:rPr sz="1200" b="1" i="0">
-                <a:solidFill>
-                  <a:srgbClr val="3AEDE5"/>
-                </a:solidFill>
-                <a:latin typeface="Alegreya Sans"/>
-              </a:rPr>
-              <a:t>•  </a:t>
-            </a:r>
-            <a:r>
-              <a:rPr sz="1200" b="0" i="0">
-                <a:solidFill>
-                  <a:srgbClr val="FFFFFF"/>
-                </a:solidFill>
-                <a:latin typeface="Alegreya Sans"/>
-              </a:rPr>
-              <a:t>Inside Training: financial education and Personal Branding for senior executives and teams in the financial sector.</a:t>
-            </a:r>
-          </a:p>
-          <a:p>
-            <a:pPr algn="l">
-              <a:spcAft>
-                <a:spcPts val="100"/>
-              </a:spcAft>
-            </a:pPr>
-            <a:r>
-              <a:rPr sz="1200" b="1" i="0">
-                <a:solidFill>
-                  <a:srgbClr val="3AEDE5"/>
-                </a:solidFill>
-                <a:latin typeface="Alegreya Sans"/>
-              </a:rPr>
-              <a:t>▸ </a:t>
-            </a:r>
-            <a:r>
-              <a:rPr sz="1200" b="1" i="0">
-                <a:solidFill>
-                  <a:srgbClr val="FFFFFF"/>
-                </a:solidFill>
-                <a:latin typeface="Alegreya Sans"/>
-              </a:rPr>
-              <a:t>EY</a:t>
-            </a:r>
-            <a:r>
-              <a:rPr sz="1200" b="0" i="0">
-                <a:solidFill>
-                  <a:srgbClr val="FFFFFF"/>
-                </a:solidFill>
-                <a:latin typeface="Alegreya Sans"/>
-              </a:rPr>
-              <a:t> — Senior Consultant → Senior Manager</a:t>
-            </a:r>
-            <a:r>
-              <a:rPr sz="1200" b="0" i="1">
-                <a:solidFill>
-                  <a:srgbClr val="3AEDE5"/>
-                </a:solidFill>
-                <a:latin typeface="Alegreya Sans"/>
-              </a:rPr>
-              <a:t>  (Oct. 19 — Dec. 25)</a:t>
-            </a:r>
-          </a:p>
-          <a:p>
-            <a:pPr algn="l" lvl="1">
-              <a:spcAft>
-                <a:spcPts val="100"/>
-              </a:spcAft>
-            </a:pPr>
-            <a:r>
-              <a:rPr sz="1200" b="1" i="0">
-                <a:solidFill>
-                  <a:srgbClr val="3AEDE5"/>
-                </a:solidFill>
-                <a:latin typeface="Alegreya Sans"/>
-              </a:rPr>
-              <a:t>•  </a:t>
-            </a:r>
-            <a:r>
-              <a:rPr sz="1200" b="0" i="0">
-                <a:solidFill>
-                  <a:srgbClr val="FFFFFF"/>
-                </a:solidFill>
-                <a:latin typeface="Alegreya Sans"/>
-              </a:rPr>
-              <a:t>Redesign of the internal counterparty rating process (7 FTE); IRB credit-model rollout as part of a portfolio acquisition (TOM, supervisor e…</a:t>
-            </a:r>
-          </a:p>
-          <a:p>
-            <a:pPr algn="l" lvl="1">
-              <a:spcAft>
-                <a:spcPts val="100"/>
-              </a:spcAft>
-            </a:pPr>
-            <a:r>
-              <a:rPr sz="1200" b="1" i="0">
-                <a:solidFill>
-                  <a:srgbClr val="3AEDE5"/>
-                </a:solidFill>
-                <a:latin typeface="Alegreya Sans"/>
-              </a:rPr>
-              <a:t>•  </a:t>
-            </a:r>
-            <a:r>
-              <a:rPr sz="1200" b="0" i="0">
-                <a:solidFill>
-                  <a:srgbClr val="FFFFFF"/>
-                </a:solidFill>
-                <a:latin typeface="Alegreya Sans"/>
-              </a:rPr>
-              <a:t>Lead of digital-risk projects for a G-SIB: EU AI Act compliance, risk-management framework.</a:t>
-            </a:r>
-          </a:p>
-          <a:p>
-            <a:pPr algn="l">
-              <a:spcAft>
-                <a:spcPts val="100"/>
-              </a:spcAft>
-            </a:pPr>
-            <a:r>
-              <a:rPr sz="1200" b="1" i="0">
-                <a:solidFill>
-                  <a:srgbClr val="3AEDE5"/>
-                </a:solidFill>
-                <a:latin typeface="Alegreya Sans"/>
-              </a:rPr>
-              <a:t>▸ </a:t>
-            </a:r>
-            <a:r>
-              <a:rPr sz="1200" b="1" i="0">
-                <a:solidFill>
-                  <a:srgbClr val="FFFFFF"/>
-                </a:solidFill>
-                <a:latin typeface="Alegreya Sans"/>
-              </a:rPr>
-              <a:t>PwC</a:t>
-            </a:r>
-            <a:r>
-              <a:rPr sz="1200" b="0" i="0">
-                <a:solidFill>
-                  <a:srgbClr val="FFFFFF"/>
-                </a:solidFill>
-                <a:latin typeface="Alegreya Sans"/>
-              </a:rPr>
-              <a:t> — Consultant Financial Services</a:t>
-            </a:r>
-            <a:r>
-              <a:rPr sz="1200" b="0" i="1">
-                <a:solidFill>
-                  <a:srgbClr val="3AEDE5"/>
-                </a:solidFill>
-                <a:latin typeface="Alegreya Sans"/>
-              </a:rPr>
-              <a:t>  (Sept. 17 — Oct. 19)</a:t>
-            </a:r>
-          </a:p>
-          <a:p>
-            <a:pPr algn="l" lvl="1">
-              <a:spcAft>
-                <a:spcPts val="100"/>
-              </a:spcAft>
-            </a:pPr>
-            <a:r>
-              <a:rPr sz="1200" b="1" i="0">
-                <a:solidFill>
-                  <a:srgbClr val="3AEDE5"/>
-                </a:solidFill>
-                <a:latin typeface="Alegreya Sans"/>
-              </a:rPr>
-              <a:t>•  </a:t>
-            </a:r>
-            <a:r>
-              <a:rPr sz="1200" b="0" i="0">
-                <a:solidFill>
-                  <a:srgbClr val="FFFFFF"/>
-                </a:solidFill>
-                <a:latin typeface="Alegreya Sans"/>
-              </a:rPr>
-              <a:t>Coordination of a US-regulator certification for a French G-SIB (10 entities).</a:t>
-            </a:r>
-          </a:p>
-          <a:p>
-            <a:pPr algn="l" lvl="1">
-              <a:spcAft>
-                <a:spcPts val="100"/>
-              </a:spcAft>
-            </a:pPr>
-            <a:r>
-              <a:rPr sz="1200" b="1" i="0">
-                <a:solidFill>
-                  <a:srgbClr val="3AEDE5"/>
-                </a:solidFill>
-                <a:latin typeface="Alegreya Sans"/>
-              </a:rPr>
-              <a:t>•  </a:t>
-            </a:r>
-            <a:r>
-              <a:rPr sz="1200" b="0" i="0">
-                <a:solidFill>
-                  <a:srgbClr val="FFFFFF"/>
-                </a:solidFill>
-                <a:latin typeface="Alegreya Sans"/>
-              </a:rPr>
-              <a:t>Design of regulatory training rolled out to 8,000+ employees.</a:t>
-            </a:r>
-          </a:p>
-          <a:p>
-            <a:pPr algn="l">
-              <a:spcAft>
-                <a:spcPts val="100"/>
-              </a:spcAft>
-            </a:pPr>
-            <a:r>
-              <a:rPr sz="1200" b="1" i="0">
-                <a:solidFill>
-                  <a:srgbClr val="3AEDE5"/>
-                </a:solidFill>
-                <a:latin typeface="Alegreya Sans"/>
-              </a:rPr>
-              <a:t>▸ </a:t>
-            </a:r>
-            <a:r>
-              <a:rPr sz="1200" b="1" i="0">
-                <a:solidFill>
-                  <a:srgbClr val="FFFFFF"/>
-                </a:solidFill>
-                <a:latin typeface="Alegreya Sans"/>
-              </a:rPr>
-              <a:t>Mazars</a:t>
-            </a:r>
-            <a:r>
-              <a:rPr sz="1200" b="0" i="0">
-                <a:solidFill>
-                  <a:srgbClr val="FFFFFF"/>
-                </a:solidFill>
-                <a:latin typeface="Alegreya Sans"/>
-              </a:rPr>
-              <a:t> — Consultant Financial Services</a:t>
-            </a:r>
-            <a:r>
-              <a:rPr sz="1200" b="0" i="1">
-                <a:solidFill>
-                  <a:srgbClr val="3AEDE5"/>
-                </a:solidFill>
-                <a:latin typeface="Alegreya Sans"/>
-              </a:rPr>
-              <a:t>  (April — Sept. 17)</a:t>
-            </a:r>
-          </a:p>
-          <a:p>
-            <a:pPr algn="l" lvl="1">
-              <a:spcAft>
-                <a:spcPts val="100"/>
-              </a:spcAft>
-            </a:pPr>
-            <a:r>
-              <a:rPr sz="1200" b="1" i="0">
-                <a:solidFill>
-                  <a:srgbClr val="3AEDE5"/>
-                </a:solidFill>
-                <a:latin typeface="Alegreya Sans"/>
-              </a:rPr>
-              <a:t>•  </a:t>
-            </a:r>
-            <a:r>
-              <a:rPr sz="1200" b="0" i="0">
-                <a:solidFill>
-                  <a:srgbClr val="FFFFFF"/>
-                </a:solidFill>
-                <a:latin typeface="Alegreya Sans"/>
-              </a:rPr>
-              <a:t>Drafting of a Preventive Recovery Plan (PPR) for a foreign banking group: strategic analysis, recovery options, stress tests, governance.</a:t>
-            </a:r>
-          </a:p>
-          <a:p>
-            <a:pPr algn="l">
-              <a:spcBef>
-                <a:spcPts val="600"/>
-              </a:spcBef>
-              <a:spcAft>
-                <a:spcPts val="300"/>
-              </a:spcAft>
-            </a:pPr>
-            <a:r>
-              <a:rPr sz="1300" b="1" i="0">
-                <a:solidFill>
-                  <a:srgbClr val="3AEDE5"/>
-                </a:solidFill>
-                <a:latin typeface="Alegreya Sans"/>
-              </a:rPr>
-              <a:t>MAIN REFERENCES</a:t>
-            </a:r>
-          </a:p>
-          <a:p>
-            <a:pPr algn="l">
-              <a:spcAft>
-                <a:spcPts val="200"/>
-              </a:spcAft>
-            </a:pPr>
-            <a:r>
-              <a:rPr sz="1200" b="0" i="1">
-                <a:solidFill>
-                  <a:srgbClr val="FFFFFF"/>
-                </a:solidFill>
-                <a:latin typeface="Alegreya Sans"/>
-              </a:rPr>
-              <a:t>French G-SIB, Banque Populaire (BPACA), EY, PwC, Mazars</a:t>
-            </a:r>
           </a:p>
         </p:txBody>
       </p:sp>

--- a/outputs/R.M._risk_regulatory.pptx
+++ b/outputs/R.M._risk_regulatory.pptx
@@ -3640,7 +3640,7 @@
                 </a:solidFill>
                 <a:latin typeface="Alegreya Sans"/>
               </a:rPr>
-              <a:t>Magistère d'Économie &amp; Finance Internati…</a:t>
+              <a:t>Magistère d'Économie &amp; Finance Internationales</a:t>
             </a:r>
           </a:p>
           <a:p>
@@ -3734,7 +3734,7 @@
                 </a:solidFill>
                 <a:latin typeface="Alegreya Sans"/>
               </a:rPr>
-              <a:t> — Lettre réglementaire banque EY Fran…</a:t>
+              <a:t> — Lettre réglementaire banque EY France</a:t>
             </a:r>
           </a:p>
           <a:p>
@@ -3768,7 +3768,7 @@
                 </a:solidFill>
                 <a:latin typeface="Alegreya Sans"/>
               </a:rPr>
-              <a:t> — 2 comptes prioritaires Risk &amp; Regul…</a:t>
+              <a:t> — 2 comptes prioritaires Risk &amp; Regulatory</a:t>
             </a:r>
           </a:p>
           <a:p>
@@ -3909,7 +3909,7 @@
                 </a:solidFill>
                 <a:latin typeface="Alegreya Sans"/>
               </a:rPr>
-              <a:t>Communauté de freelances du secteur financier (banque, assurance, AM) ; média indépendant (2,5M vues 2025, podcast +50K écoutes, newsletter…</a:t>
+              <a:t>Communauté de freelances du secteur financier (banque, assurance, AM) ; média indépendant (2,5M vues 2025, podcast +50K écoutes, newsletter +13K abonnés).</a:t>
             </a:r>
           </a:p>
           <a:p>
@@ -4002,7 +4002,7 @@
                 </a:solidFill>
                 <a:latin typeface="Alegreya Sans"/>
               </a:rPr>
-              <a:t>Refonte du processus de rating interne des contreparties (7 ETP) ; déploiement de modèles IRB dans le cadre d'un rachat de portefeuille (TOM…</a:t>
+              <a:t>Refonte du processus de rating interne des contreparties (7 ETP) ; déploiement de modèles IRB dans le cadre d'un rachat de portefeuille (TOM, échanges superviseur, infrastructure IT/Data).</a:t>
             </a:r>
           </a:p>
           <a:p>
@@ -4188,7 +4188,7 @@
                 </a:solidFill>
                 <a:latin typeface="Alegreya Sans"/>
               </a:rPr>
-              <a:t>Définition et rédaction d'un Plan Préventif de Rétablissement (PPR) pour un groupe bancaire étranger : analyse stratégique, options de redre…</a:t>
+              <a:t>Définition et rédaction d'un Plan Préventif de Rétablissement (PPR) pour un groupe bancaire étranger : analyse stratégique, options de redressement, stress tests, gouvernance.</a:t>
             </a:r>
           </a:p>
           <a:p>
@@ -4876,7 +4876,7 @@
                 </a:solidFill>
                 <a:latin typeface="Alegreya Sans"/>
               </a:rPr>
-              <a:t>Magistère in Economics &amp; International F…</a:t>
+              <a:t>Magistère in Economics &amp; International Finance</a:t>
             </a:r>
           </a:p>
           <a:p>
@@ -4970,7 +4970,7 @@
                 </a:solidFill>
                 <a:latin typeface="Alegreya Sans"/>
               </a:rPr>
-              <a:t> — EY France banking regulatory newsle…</a:t>
+              <a:t> — EY France banking regulatory newsletter</a:t>
             </a:r>
           </a:p>
           <a:p>
@@ -5004,7 +5004,7 @@
                 </a:solidFill>
                 <a:latin typeface="Alegreya Sans"/>
               </a:rPr>
-              <a:t> — Two priority Risk &amp; Regulatory acco…</a:t>
+              <a:t> — Two priority Risk &amp; Regulatory accounts</a:t>
             </a:r>
           </a:p>
           <a:p>
@@ -5145,7 +5145,7 @@
                 </a:solidFill>
                 <a:latin typeface="Alegreya Sans"/>
               </a:rPr>
-              <a:t>Financial-sector freelance community (banking, insurance, AM); independent media (2.5M views in 2025, podcast +50K listens, newsletter +13K…</a:t>
+              <a:t>Financial-sector freelance community (banking, insurance, AM); independent media (2.5M views in 2025, podcast +50K listens, newsletter +13K subscribers).</a:t>
             </a:r>
           </a:p>
           <a:p>
@@ -5238,7 +5238,7 @@
                 </a:solidFill>
                 <a:latin typeface="Alegreya Sans"/>
               </a:rPr>
-              <a:t>Redesign of the internal counterparty rating process (7 FTE); IRB credit-model rollout as part of a portfolio acquisition (TOM, supervisor e…</a:t>
+              <a:t>Redesign of the internal counterparty rating process (7 FTE); IRB credit-model rollout as part of a portfolio acquisition (TOM, supervisor exchanges, IT/Data infrastructure).</a:t>
             </a:r>
           </a:p>
           <a:p>

--- a/outputs/R.M._risk_regulatory.pptx
+++ b/outputs/R.M._risk_regulatory.pptx
@@ -3209,8 +3209,8 @@
         </p:nvSpPr>
         <p:spPr>
           <a:xfrm>
-            <a:off x="228600" y="260000"/>
-            <a:ext cx="3842800" cy="800000"/>
+            <a:off x="228600" y="240000"/>
+            <a:ext cx="3842800" cy="1300000"/>
           </a:xfrm>
           <a:prstGeom prst="rect">
             <a:avLst/>
@@ -3225,13 +3225,29 @@
           <a:p>
             <a:pPr algn="l"/>
             <a:r>
-              <a:rPr sz="4800" b="1" i="0">
-                <a:solidFill>
-                  <a:srgbClr val="3AEDE5"/>
-                </a:solidFill>
-                <a:latin typeface="Alegreya Sans"/>
-              </a:rPr>
-              <a:t>R.M.</a:t>
+              <a:rPr sz="2800" b="0" i="0">
+                <a:solidFill>
+                  <a:srgbClr val="3AEDE5"/>
+                </a:solidFill>
+                <a:latin typeface="Alegreya Sans"/>
+              </a:rPr>
+              <a:t>Richard</a:t>
+            </a:r>
+          </a:p>
+          <a:p>
+            <a:pPr>
+              <a:spcBef>
+                <a:spcPts val="0"/>
+              </a:spcBef>
+            </a:pPr>
+            <a:r>
+              <a:rPr sz="3200" b="1" i="0">
+                <a:solidFill>
+                  <a:srgbClr val="3AEDE5"/>
+                </a:solidFill>
+                <a:latin typeface="Alegreya Sans"/>
+              </a:rPr>
+              <a:t>MICHAUD</a:t>
             </a:r>
           </a:p>
         </p:txBody>
@@ -3599,7 +3615,7 @@
                 </a:solidFill>
                 <a:latin typeface="Alegreya Sans"/>
               </a:rPr>
-              <a:t>Master 2 Banque &amp; Finance</a:t>
+              <a:t>Master 2 Banque Finance</a:t>
             </a:r>
           </a:p>
           <a:p>
@@ -3656,16 +3672,16 @@
                 </a:solidFill>
                 <a:latin typeface="Alegreya Sans"/>
               </a:rPr>
-              <a:t>2012 — 2013  </a:t>
-            </a:r>
-            <a:r>
-              <a:rPr sz="1200" b="1" i="0">
-                <a:solidFill>
-                  <a:srgbClr val="FFFFFF"/>
-                </a:solidFill>
-                <a:latin typeface="Alegreya Sans"/>
-              </a:rPr>
-              <a:t>Lycée Michel Montaigne</a:t>
+              <a:t>—  </a:t>
+            </a:r>
+            <a:r>
+              <a:rPr sz="1200" b="1" i="0">
+                <a:solidFill>
+                  <a:srgbClr val="FFFFFF"/>
+                </a:solidFill>
+                <a:latin typeface="Alegreya Sans"/>
+              </a:rPr>
+              <a:t>Certifications</a:t>
             </a:r>
           </a:p>
           <a:p>
@@ -3681,7 +3697,7 @@
                 </a:solidFill>
                 <a:latin typeface="Alegreya Sans"/>
               </a:rPr>
-              <a:t>Prépa HEC, voie ECE</a:t>
+              <a:t>AMF, AMF-ARPP</a:t>
             </a:r>
           </a:p>
           <a:p>
@@ -3735,40 +3751,6 @@
                 <a:latin typeface="Alegreya Sans"/>
               </a:rPr>
               <a:t> — Lettre réglementaire banque EY France</a:t>
-            </a:r>
-          </a:p>
-          <a:p>
-            <a:pPr algn="l">
-              <a:spcAft>
-                <a:spcPts val="200"/>
-              </a:spcAft>
-            </a:pPr>
-            <a:r>
-              <a:rPr sz="1200" b="1" i="0">
-                <a:solidFill>
-                  <a:srgbClr val="3AEDE5"/>
-                </a:solidFill>
-                <a:latin typeface="Alegreya Sans"/>
-              </a:rPr>
-              <a:t>• </a:t>
-            </a:r>
-            <a:r>
-              <a:rPr sz="1200" b="1" i="0">
-                <a:solidFill>
-                  <a:srgbClr val="FFFFFF"/>
-                </a:solidFill>
-                <a:latin typeface="Alegreya Sans"/>
-              </a:rPr>
-              <a:t>Référent G-SIB</a:t>
-            </a:r>
-            <a:r>
-              <a:rPr sz="1200" b="0" i="1">
-                <a:solidFill>
-                  <a:srgbClr val="CCD6E8"/>
-                </a:solidFill>
-                <a:latin typeface="Alegreya Sans"/>
-              </a:rPr>
-              <a:t> — 2 comptes prioritaires Risk &amp; Regulatory</a:t>
             </a:r>
           </a:p>
           <a:p>
@@ -3841,7 +3823,7 @@
                 </a:solidFill>
                 <a:latin typeface="Alegreya Sans"/>
               </a:rPr>
-              <a:t>EXPÉRIENCE PROFESSIONNELLE</a:t>
+              <a:t>PRINCIPALES EXPÉRIENCES PROFESSIONNELLES</a:t>
             </a:r>
           </a:p>
           <a:p>
@@ -3909,7 +3891,7 @@
                 </a:solidFill>
                 <a:latin typeface="Alegreya Sans"/>
               </a:rPr>
-              <a:t>Communauté de freelances du secteur financier (banque, assurance, AM) ; média indépendant (2,5M vues 2025, podcast +50K écoutes, newsletter +13K abonnés).</a:t>
+              <a:t>Inside Circle : collectif de +30 freelances du secteur financier (banque, assurance, AM) ; Inside Banking : média leader (4M vues / 12 mois, podcast n°1 en France +70K écoutes, newsletter +14K abonnés).</a:t>
             </a:r>
           </a:p>
           <a:p>
@@ -3934,7 +3916,7 @@
                 </a:solidFill>
                 <a:latin typeface="Alegreya Sans"/>
               </a:rPr>
-              <a:t>Inside Training : pédagogie / éducation financière et Personal Branding pour dirigeants et équipes du secteur financier.</a:t>
+              <a:t>Inside Training : organisme de formation new gen — éducation financière B2B, marque blanche et Personal Branding pour dirigeants.</a:t>
             </a:r>
           </a:p>
           <a:p>
@@ -4002,7 +3984,7 @@
                 </a:solidFill>
                 <a:latin typeface="Alegreya Sans"/>
               </a:rPr>
-              <a:t>Refonte du processus de rating interne des contreparties (7 ETP) ; déploiement de modèles IRB dans le cadre d'un rachat de portefeuille (TOM, échanges superviseur, infrastructure IT/Data).</a:t>
+              <a:t>Refonte du processus de rating interne des contreparties (7 ETP) ; déploiement de modèles IRB dans le cadre d'un rachat de portefeuille (TOM, superviseur, infrastructure IT/Data).</a:t>
             </a:r>
           </a:p>
           <a:p>
@@ -4027,7 +4009,7 @@
                 </a:solidFill>
                 <a:latin typeface="Alegreya Sans"/>
               </a:rPr>
-              <a:t>Pilotage de projets « risques digitaux » pour une G-SIB : mise en conformité EU AI Act, dispositif de gestion des risques.</a:t>
+              <a:t>Pilotage de projets « risques digitaux » pour une G-SIB : mise en conformité EU AI Act ; référent Risk &amp; Regulatory pour 2 comptes prioritaires (G-SIB françaises).</a:t>
             </a:r>
           </a:p>
           <a:p>
@@ -4095,7 +4077,7 @@
                 </a:solidFill>
                 <a:latin typeface="Alegreya Sans"/>
               </a:rPr>
-              <a:t>Coordination d'une certification auprès du régulateur US pour une G-SIB française (10 entités).</a:t>
+              <a:t>Projets réglementaires pour une G-SIB française (périmètre CIB) : coordination d'une certification auprès du régulateur US (10 entités).</a:t>
             </a:r>
           </a:p>
           <a:p>
@@ -4223,7 +4205,7 @@
                 </a:solidFill>
                 <a:latin typeface="Alegreya Sans"/>
               </a:rPr>
-              <a:t>G-SIB française, Banque Populaire (BPACA), EY, PwC, Mazars</a:t>
+              <a:t>EY, PwC, Mazars, Banque Populaire (BPACA)</a:t>
             </a:r>
           </a:p>
         </p:txBody>
@@ -4445,8 +4427,8 @@
         </p:nvSpPr>
         <p:spPr>
           <a:xfrm>
-            <a:off x="228600" y="260000"/>
-            <a:ext cx="3842800" cy="800000"/>
+            <a:off x="228600" y="240000"/>
+            <a:ext cx="3842800" cy="1300000"/>
           </a:xfrm>
           <a:prstGeom prst="rect">
             <a:avLst/>
@@ -4461,13 +4443,29 @@
           <a:p>
             <a:pPr algn="l"/>
             <a:r>
-              <a:rPr sz="4800" b="1" i="0">
-                <a:solidFill>
-                  <a:srgbClr val="3AEDE5"/>
-                </a:solidFill>
-                <a:latin typeface="Alegreya Sans"/>
-              </a:rPr>
-              <a:t>R.M.</a:t>
+              <a:rPr sz="2800" b="0" i="0">
+                <a:solidFill>
+                  <a:srgbClr val="3AEDE5"/>
+                </a:solidFill>
+                <a:latin typeface="Alegreya Sans"/>
+              </a:rPr>
+              <a:t>Richard</a:t>
+            </a:r>
+          </a:p>
+          <a:p>
+            <a:pPr>
+              <a:spcBef>
+                <a:spcPts val="0"/>
+              </a:spcBef>
+            </a:pPr>
+            <a:r>
+              <a:rPr sz="3200" b="1" i="0">
+                <a:solidFill>
+                  <a:srgbClr val="3AEDE5"/>
+                </a:solidFill>
+                <a:latin typeface="Alegreya Sans"/>
+              </a:rPr>
+              <a:t>MICHAUD</a:t>
             </a:r>
           </a:p>
         </p:txBody>
@@ -4892,16 +4890,16 @@
                 </a:solidFill>
                 <a:latin typeface="Alegreya Sans"/>
               </a:rPr>
-              <a:t>2012 — 2013  </a:t>
-            </a:r>
-            <a:r>
-              <a:rPr sz="1200" b="1" i="0">
-                <a:solidFill>
-                  <a:srgbClr val="FFFFFF"/>
-                </a:solidFill>
-                <a:latin typeface="Alegreya Sans"/>
-              </a:rPr>
-              <a:t>Lycée Michel Montaigne</a:t>
+              <a:t>—  </a:t>
+            </a:r>
+            <a:r>
+              <a:rPr sz="1200" b="1" i="0">
+                <a:solidFill>
+                  <a:srgbClr val="FFFFFF"/>
+                </a:solidFill>
+                <a:latin typeface="Alegreya Sans"/>
+              </a:rPr>
+              <a:t>Certifications</a:t>
             </a:r>
           </a:p>
           <a:p>
@@ -4917,7 +4915,7 @@
                 </a:solidFill>
                 <a:latin typeface="Alegreya Sans"/>
               </a:rPr>
-              <a:t>Prépa HEC, ECE track</a:t>
+              <a:t>AMF, AMF-ARPP</a:t>
             </a:r>
           </a:p>
           <a:p>
@@ -4971,40 +4969,6 @@
                 <a:latin typeface="Alegreya Sans"/>
               </a:rPr>
               <a:t> — EY France banking regulatory newsletter</a:t>
-            </a:r>
-          </a:p>
-          <a:p>
-            <a:pPr algn="l">
-              <a:spcAft>
-                <a:spcPts val="200"/>
-              </a:spcAft>
-            </a:pPr>
-            <a:r>
-              <a:rPr sz="1200" b="1" i="0">
-                <a:solidFill>
-                  <a:srgbClr val="3AEDE5"/>
-                </a:solidFill>
-                <a:latin typeface="Alegreya Sans"/>
-              </a:rPr>
-              <a:t>• </a:t>
-            </a:r>
-            <a:r>
-              <a:rPr sz="1200" b="1" i="0">
-                <a:solidFill>
-                  <a:srgbClr val="FFFFFF"/>
-                </a:solidFill>
-                <a:latin typeface="Alegreya Sans"/>
-              </a:rPr>
-              <a:t>G-SIB lead</a:t>
-            </a:r>
-            <a:r>
-              <a:rPr sz="1200" b="0" i="1">
-                <a:solidFill>
-                  <a:srgbClr val="CCD6E8"/>
-                </a:solidFill>
-                <a:latin typeface="Alegreya Sans"/>
-              </a:rPr>
-              <a:t> — Two priority Risk &amp; Regulatory accounts</a:t>
             </a:r>
           </a:p>
           <a:p>
@@ -5077,7 +5041,7 @@
                 </a:solidFill>
                 <a:latin typeface="Alegreya Sans"/>
               </a:rPr>
-              <a:t>PROFESSIONAL EXPERIENCE</a:t>
+              <a:t>MAIN PROFESSIONAL EXPERIENCE</a:t>
             </a:r>
           </a:p>
           <a:p>
@@ -5145,7 +5109,7 @@
                 </a:solidFill>
                 <a:latin typeface="Alegreya Sans"/>
               </a:rPr>
-              <a:t>Financial-sector freelance community (banking, insurance, AM); independent media (2.5M views in 2025, podcast +50K listens, newsletter +13K subscribers).</a:t>
+              <a:t>Inside Circle: community of 30+ financial-sector freelances (banking, insurance, AM); Inside Banking: leading media (4M views / 12 months, France's #1 banking podcast +70K listens, newsletter +14K subscribers).</a:t>
             </a:r>
           </a:p>
           <a:p>
@@ -5170,7 +5134,7 @@
                 </a:solidFill>
                 <a:latin typeface="Alegreya Sans"/>
               </a:rPr>
-              <a:t>Inside Training: financial education and Personal Branding for senior executives and teams in the financial sector.</a:t>
+              <a:t>Inside Training: new-gen training organisation — B2B financial education, white-label content and Personal Branding for executives.</a:t>
             </a:r>
           </a:p>
           <a:p>
@@ -5238,7 +5202,7 @@
                 </a:solidFill>
                 <a:latin typeface="Alegreya Sans"/>
               </a:rPr>
-              <a:t>Redesign of the internal counterparty rating process (7 FTE); IRB credit-model rollout as part of a portfolio acquisition (TOM, supervisor exchanges, IT/Data infrastructure).</a:t>
+              <a:t>Redesign of the internal counterparty rating process (7 FTE); IRB credit-model rollout for a portfolio acquisition (TOM, supervisor, IT/Data infrastructure).</a:t>
             </a:r>
           </a:p>
           <a:p>
@@ -5263,7 +5227,7 @@
                 </a:solidFill>
                 <a:latin typeface="Alegreya Sans"/>
               </a:rPr>
-              <a:t>Lead of digital-risk projects for a G-SIB: EU AI Act compliance, risk-management framework.</a:t>
+              <a:t>Lead of digital-risk projects for a G-SIB: EU AI Act compliance; Risk &amp; Regulatory referent for 2 priority accounts (French G-SIBs).</a:t>
             </a:r>
           </a:p>
           <a:p>
@@ -5331,7 +5295,7 @@
                 </a:solidFill>
                 <a:latin typeface="Alegreya Sans"/>
               </a:rPr>
-              <a:t>Coordination of a US-regulator certification for a French G-SIB (10 entities).</a:t>
+              <a:t>Regulatory projects for a French G-SIB (CIB scope): coordination of a US-regulator certification (10 entities).</a:t>
             </a:r>
           </a:p>
           <a:p>
@@ -5459,7 +5423,7 @@
                 </a:solidFill>
                 <a:latin typeface="Alegreya Sans"/>
               </a:rPr>
-              <a:t>French G-SIB, Banque Populaire (BPACA), EY, PwC, Mazars</a:t>
+              <a:t>EY, PwC, Mazars, Banque Populaire (BPACA)</a:t>
             </a:r>
           </a:p>
         </p:txBody>
